--- a/slides/02-3-Karatsuba.pptx
+++ b/slides/02-3-Karatsuba.pptx
@@ -211,7 +211,7 @@
           <a:p>
             <a:fld id="{C5B45307-6ED4-B142-BD64-10F739779302}" type="datetimeFigureOut">
               <a:rPr lang="en-US" smtClean="0"/>
-              <a:t>9/26/25</a:t>
+              <a:t>2/10/26</a:t>
             </a:fld>
             <a:endParaRPr lang="en-US"/>
           </a:p>
@@ -2399,7 +2399,7 @@
           <a:noFill/>
           <a:extLst>
             <a:ext uri="{909E8E84-426E-40dd-AFC4-6F175D3DCCD1}">
-              <a14:hiddenFill xmlns="" xmlns:a14="http://schemas.microsoft.com/office/drawing/2010/main">
+              <a14:hiddenFill xmlns:a14="http://schemas.microsoft.com/office/drawing/2010/main" xmlns="">
                 <a:solidFill>
                   <a:srgbClr val="FFFFFF"/>
                 </a:solidFill>
@@ -2458,7 +2458,7 @@
             </a:ln>
             <a:extLst>
               <a:ext uri="{91240B29-F687-4f45-9708-019B960494DF}">
-                <a14:hiddenLine xmlns="" xmlns:a14="http://schemas.microsoft.com/office/drawing/2010/main" w="9525">
+                <a14:hiddenLine xmlns:a14="http://schemas.microsoft.com/office/drawing/2010/main" xmlns="" w="9525">
                   <a:solidFill>
                     <a:srgbClr val="000000"/>
                   </a:solidFill>
@@ -2548,7 +2548,7 @@
             </a:ln>
             <a:extLst>
               <a:ext uri="{91240B29-F687-4f45-9708-019B960494DF}">
-                <a14:hiddenLine xmlns="" xmlns:a14="http://schemas.microsoft.com/office/drawing/2010/main" w="9525">
+                <a14:hiddenLine xmlns:a14="http://schemas.microsoft.com/office/drawing/2010/main" xmlns="" w="9525">
                   <a:solidFill>
                     <a:srgbClr val="000000"/>
                   </a:solidFill>
@@ -2638,7 +2638,7 @@
             </a:ln>
             <a:extLst>
               <a:ext uri="{91240B29-F687-4f45-9708-019B960494DF}">
-                <a14:hiddenLine xmlns="" xmlns:a14="http://schemas.microsoft.com/office/drawing/2010/main" w="9525">
+                <a14:hiddenLine xmlns:a14="http://schemas.microsoft.com/office/drawing/2010/main" xmlns="" w="9525">
                   <a:solidFill>
                     <a:srgbClr val="000000"/>
                   </a:solidFill>
@@ -2672,7 +2672,7 @@
             </a:ln>
             <a:extLst>
               <a:ext uri="{91240B29-F687-4f45-9708-019B960494DF}">
-                <a14:hiddenLine xmlns="" xmlns:a14="http://schemas.microsoft.com/office/drawing/2010/main" w="9525">
+                <a14:hiddenLine xmlns:a14="http://schemas.microsoft.com/office/drawing/2010/main" xmlns="" w="9525">
                   <a:solidFill>
                     <a:srgbClr val="000000"/>
                   </a:solidFill>
@@ -2762,7 +2762,7 @@
             </a:ln>
             <a:extLst>
               <a:ext uri="{91240B29-F687-4f45-9708-019B960494DF}">
-                <a14:hiddenLine xmlns="" xmlns:a14="http://schemas.microsoft.com/office/drawing/2010/main" w="9525">
+                <a14:hiddenLine xmlns:a14="http://schemas.microsoft.com/office/drawing/2010/main" xmlns="" w="9525">
                   <a:solidFill>
                     <a:srgbClr val="000000"/>
                   </a:solidFill>
@@ -2824,7 +2824,7 @@
             </a:ln>
             <a:extLst>
               <a:ext uri="{91240B29-F687-4f45-9708-019B960494DF}">
-                <a14:hiddenLine xmlns="" xmlns:a14="http://schemas.microsoft.com/office/drawing/2010/main" w="9525">
+                <a14:hiddenLine xmlns:a14="http://schemas.microsoft.com/office/drawing/2010/main" xmlns="" w="9525">
                   <a:solidFill>
                     <a:srgbClr val="000000"/>
                   </a:solidFill>
@@ -2886,7 +2886,7 @@
             </a:ln>
             <a:extLst>
               <a:ext uri="{91240B29-F687-4f45-9708-019B960494DF}">
-                <a14:hiddenLine xmlns="" xmlns:a14="http://schemas.microsoft.com/office/drawing/2010/main" w="9525">
+                <a14:hiddenLine xmlns:a14="http://schemas.microsoft.com/office/drawing/2010/main" xmlns="" w="9525">
                   <a:solidFill>
                     <a:srgbClr val="000000"/>
                   </a:solidFill>
@@ -2976,7 +2976,7 @@
             </a:ln>
             <a:extLst>
               <a:ext uri="{91240B29-F687-4f45-9708-019B960494DF}">
-                <a14:hiddenLine xmlns="" xmlns:a14="http://schemas.microsoft.com/office/drawing/2010/main" w="9525">
+                <a14:hiddenLine xmlns:a14="http://schemas.microsoft.com/office/drawing/2010/main" xmlns="" w="9525">
                   <a:solidFill>
                     <a:srgbClr val="000000"/>
                   </a:solidFill>
@@ -3038,7 +3038,7 @@
             </a:ln>
             <a:extLst>
               <a:ext uri="{91240B29-F687-4f45-9708-019B960494DF}">
-                <a14:hiddenLine xmlns="" xmlns:a14="http://schemas.microsoft.com/office/drawing/2010/main" w="9525">
+                <a14:hiddenLine xmlns:a14="http://schemas.microsoft.com/office/drawing/2010/main" xmlns="" w="9525">
                   <a:solidFill>
                     <a:srgbClr val="000000"/>
                   </a:solidFill>
@@ -3100,7 +3100,7 @@
             </a:ln>
             <a:extLst>
               <a:ext uri="{91240B29-F687-4f45-9708-019B960494DF}">
-                <a14:hiddenLine xmlns="" xmlns:a14="http://schemas.microsoft.com/office/drawing/2010/main" w="9525">
+                <a14:hiddenLine xmlns:a14="http://schemas.microsoft.com/office/drawing/2010/main" xmlns="" w="9525">
                   <a:solidFill>
                     <a:srgbClr val="000000"/>
                   </a:solidFill>
@@ -3190,7 +3190,7 @@
             </a:ln>
             <a:extLst>
               <a:ext uri="{91240B29-F687-4f45-9708-019B960494DF}">
-                <a14:hiddenLine xmlns="" xmlns:a14="http://schemas.microsoft.com/office/drawing/2010/main" w="9525">
+                <a14:hiddenLine xmlns:a14="http://schemas.microsoft.com/office/drawing/2010/main" xmlns="" w="9525">
                   <a:solidFill>
                     <a:srgbClr val="000000"/>
                   </a:solidFill>
@@ -3280,7 +3280,7 @@
             </a:ln>
             <a:extLst>
               <a:ext uri="{91240B29-F687-4f45-9708-019B960494DF}">
-                <a14:hiddenLine xmlns="" xmlns:a14="http://schemas.microsoft.com/office/drawing/2010/main" w="9525">
+                <a14:hiddenLine xmlns:a14="http://schemas.microsoft.com/office/drawing/2010/main" xmlns="" w="9525">
                   <a:solidFill>
                     <a:srgbClr val="000000"/>
                   </a:solidFill>
@@ -3342,7 +3342,7 @@
             </a:ln>
             <a:extLst>
               <a:ext uri="{91240B29-F687-4f45-9708-019B960494DF}">
-                <a14:hiddenLine xmlns="" xmlns:a14="http://schemas.microsoft.com/office/drawing/2010/main" w="9525">
+                <a14:hiddenLine xmlns:a14="http://schemas.microsoft.com/office/drawing/2010/main" xmlns="" w="9525">
                   <a:solidFill>
                     <a:srgbClr val="000000"/>
                   </a:solidFill>
@@ -3452,7 +3452,7 @@
             </a:ln>
             <a:extLst>
               <a:ext uri="{91240B29-F687-4f45-9708-019B960494DF}">
-                <a14:hiddenLine xmlns="" xmlns:a14="http://schemas.microsoft.com/office/drawing/2010/main" w="9525">
+                <a14:hiddenLine xmlns:a14="http://schemas.microsoft.com/office/drawing/2010/main" xmlns="" w="9525">
                   <a:solidFill>
                     <a:srgbClr val="000000"/>
                   </a:solidFill>
@@ -3514,7 +3514,7 @@
             </a:ln>
             <a:extLst>
               <a:ext uri="{91240B29-F687-4f45-9708-019B960494DF}">
-                <a14:hiddenLine xmlns="" xmlns:a14="http://schemas.microsoft.com/office/drawing/2010/main" w="9525">
+                <a14:hiddenLine xmlns:a14="http://schemas.microsoft.com/office/drawing/2010/main" xmlns="" w="9525">
                   <a:solidFill>
                     <a:srgbClr val="000000"/>
                   </a:solidFill>
@@ -3604,7 +3604,7 @@
             </a:ln>
             <a:extLst>
               <a:ext uri="{91240B29-F687-4f45-9708-019B960494DF}">
-                <a14:hiddenLine xmlns="" xmlns:a14="http://schemas.microsoft.com/office/drawing/2010/main" w="9525">
+                <a14:hiddenLine xmlns:a14="http://schemas.microsoft.com/office/drawing/2010/main" xmlns="" w="9525">
                   <a:solidFill>
                     <a:srgbClr val="000000"/>
                   </a:solidFill>
@@ -3694,7 +3694,7 @@
             </a:ln>
             <a:extLst>
               <a:ext uri="{91240B29-F687-4f45-9708-019B960494DF}">
-                <a14:hiddenLine xmlns="" xmlns:a14="http://schemas.microsoft.com/office/drawing/2010/main" w="9525">
+                <a14:hiddenLine xmlns:a14="http://schemas.microsoft.com/office/drawing/2010/main" xmlns="" w="9525">
                   <a:solidFill>
                     <a:srgbClr val="000000"/>
                   </a:solidFill>
@@ -3756,7 +3756,7 @@
             </a:ln>
             <a:extLst>
               <a:ext uri="{91240B29-F687-4f45-9708-019B960494DF}">
-                <a14:hiddenLine xmlns="" xmlns:a14="http://schemas.microsoft.com/office/drawing/2010/main" w="9525">
+                <a14:hiddenLine xmlns:a14="http://schemas.microsoft.com/office/drawing/2010/main" xmlns="" w="9525">
                   <a:solidFill>
                     <a:srgbClr val="000000"/>
                   </a:solidFill>
@@ -3846,7 +3846,7 @@
             </a:ln>
             <a:extLst>
               <a:ext uri="{91240B29-F687-4f45-9708-019B960494DF}">
-                <a14:hiddenLine xmlns="" xmlns:a14="http://schemas.microsoft.com/office/drawing/2010/main" w="9525">
+                <a14:hiddenLine xmlns:a14="http://schemas.microsoft.com/office/drawing/2010/main" xmlns="" w="9525">
                   <a:solidFill>
                     <a:srgbClr val="000000"/>
                   </a:solidFill>
@@ -3936,7 +3936,7 @@
             </a:ln>
             <a:extLst>
               <a:ext uri="{91240B29-F687-4f45-9708-019B960494DF}">
-                <a14:hiddenLine xmlns="" xmlns:a14="http://schemas.microsoft.com/office/drawing/2010/main" w="9525">
+                <a14:hiddenLine xmlns:a14="http://schemas.microsoft.com/office/drawing/2010/main" xmlns="" w="9525">
                   <a:solidFill>
                     <a:srgbClr val="000000"/>
                   </a:solidFill>
@@ -3992,7 +3992,7 @@
             </a:ln>
             <a:extLst>
               <a:ext uri="{91240B29-F687-4f45-9708-019B960494DF}">
-                <a14:hiddenLine xmlns="" xmlns:a14="http://schemas.microsoft.com/office/drawing/2010/main" w="9525">
+                <a14:hiddenLine xmlns:a14="http://schemas.microsoft.com/office/drawing/2010/main" xmlns="" w="9525">
                   <a:solidFill>
                     <a:srgbClr val="000000"/>
                   </a:solidFill>
@@ -4082,7 +4082,7 @@
             </a:ln>
             <a:extLst>
               <a:ext uri="{91240B29-F687-4f45-9708-019B960494DF}">
-                <a14:hiddenLine xmlns="" xmlns:a14="http://schemas.microsoft.com/office/drawing/2010/main" w="9525">
+                <a14:hiddenLine xmlns:a14="http://schemas.microsoft.com/office/drawing/2010/main" xmlns="" w="9525">
                   <a:solidFill>
                     <a:srgbClr val="000000"/>
                   </a:solidFill>
@@ -4138,7 +4138,7 @@
             </a:ln>
             <a:extLst>
               <a:ext uri="{91240B29-F687-4f45-9708-019B960494DF}">
-                <a14:hiddenLine xmlns="" xmlns:a14="http://schemas.microsoft.com/office/drawing/2010/main" w="9525">
+                <a14:hiddenLine xmlns:a14="http://schemas.microsoft.com/office/drawing/2010/main" xmlns="" w="9525">
                   <a:solidFill>
                     <a:srgbClr val="000000"/>
                   </a:solidFill>
@@ -4228,7 +4228,7 @@
             </a:ln>
             <a:extLst>
               <a:ext uri="{91240B29-F687-4f45-9708-019B960494DF}">
-                <a14:hiddenLine xmlns="" xmlns:a14="http://schemas.microsoft.com/office/drawing/2010/main" w="9525">
+                <a14:hiddenLine xmlns:a14="http://schemas.microsoft.com/office/drawing/2010/main" xmlns="" w="9525">
                   <a:solidFill>
                     <a:srgbClr val="000000"/>
                   </a:solidFill>
@@ -4296,7 +4296,7 @@
             </a:ln>
             <a:extLst>
               <a:ext uri="{91240B29-F687-4f45-9708-019B960494DF}">
-                <a14:hiddenLine xmlns="" xmlns:a14="http://schemas.microsoft.com/office/drawing/2010/main" w="9525">
+                <a14:hiddenLine xmlns:a14="http://schemas.microsoft.com/office/drawing/2010/main" xmlns="" w="9525">
                   <a:solidFill>
                     <a:srgbClr val="000000"/>
                   </a:solidFill>
@@ -4386,7 +4386,7 @@
             </a:ln>
             <a:extLst>
               <a:ext uri="{91240B29-F687-4f45-9708-019B960494DF}">
-                <a14:hiddenLine xmlns="" xmlns:a14="http://schemas.microsoft.com/office/drawing/2010/main" w="9525">
+                <a14:hiddenLine xmlns:a14="http://schemas.microsoft.com/office/drawing/2010/main" xmlns="" w="9525">
                   <a:solidFill>
                     <a:srgbClr val="000000"/>
                   </a:solidFill>
@@ -4454,7 +4454,7 @@
             </a:ln>
             <a:extLst>
               <a:ext uri="{91240B29-F687-4f45-9708-019B960494DF}">
-                <a14:hiddenLine xmlns="" xmlns:a14="http://schemas.microsoft.com/office/drawing/2010/main" w="9525">
+                <a14:hiddenLine xmlns:a14="http://schemas.microsoft.com/office/drawing/2010/main" xmlns="" w="9525">
                   <a:solidFill>
                     <a:srgbClr val="000000"/>
                   </a:solidFill>
@@ -4544,7 +4544,7 @@
             </a:ln>
             <a:extLst>
               <a:ext uri="{91240B29-F687-4f45-9708-019B960494DF}">
-                <a14:hiddenLine xmlns="" xmlns:a14="http://schemas.microsoft.com/office/drawing/2010/main" w="9525">
+                <a14:hiddenLine xmlns:a14="http://schemas.microsoft.com/office/drawing/2010/main" xmlns="" w="9525">
                   <a:solidFill>
                     <a:srgbClr val="000000"/>
                   </a:solidFill>
@@ -4578,7 +4578,7 @@
             </a:ln>
             <a:extLst>
               <a:ext uri="{91240B29-F687-4f45-9708-019B960494DF}">
-                <a14:hiddenLine xmlns="" xmlns:a14="http://schemas.microsoft.com/office/drawing/2010/main" w="9525">
+                <a14:hiddenLine xmlns:a14="http://schemas.microsoft.com/office/drawing/2010/main" xmlns="" w="9525">
                   <a:solidFill>
                     <a:srgbClr val="000000"/>
                   </a:solidFill>
@@ -4668,7 +4668,7 @@
             </a:ln>
             <a:extLst>
               <a:ext uri="{91240B29-F687-4f45-9708-019B960494DF}">
-                <a14:hiddenLine xmlns="" xmlns:a14="http://schemas.microsoft.com/office/drawing/2010/main" w="9525">
+                <a14:hiddenLine xmlns:a14="http://schemas.microsoft.com/office/drawing/2010/main" xmlns="" w="9525">
                   <a:solidFill>
                     <a:srgbClr val="000000"/>
                   </a:solidFill>
@@ -4730,7 +4730,7 @@
             </a:ln>
             <a:extLst>
               <a:ext uri="{91240B29-F687-4f45-9708-019B960494DF}">
-                <a14:hiddenLine xmlns="" xmlns:a14="http://schemas.microsoft.com/office/drawing/2010/main" w="9525">
+                <a14:hiddenLine xmlns:a14="http://schemas.microsoft.com/office/drawing/2010/main" xmlns="" w="9525">
                   <a:solidFill>
                     <a:srgbClr val="000000"/>
                   </a:solidFill>
@@ -4792,7 +4792,7 @@
             </a:ln>
             <a:extLst>
               <a:ext uri="{91240B29-F687-4f45-9708-019B960494DF}">
-                <a14:hiddenLine xmlns="" xmlns:a14="http://schemas.microsoft.com/office/drawing/2010/main" w="9525">
+                <a14:hiddenLine xmlns:a14="http://schemas.microsoft.com/office/drawing/2010/main" xmlns="" w="9525">
                   <a:solidFill>
                     <a:srgbClr val="000000"/>
                   </a:solidFill>
@@ -4882,7 +4882,7 @@
             </a:ln>
             <a:extLst>
               <a:ext uri="{91240B29-F687-4f45-9708-019B960494DF}">
-                <a14:hiddenLine xmlns="" xmlns:a14="http://schemas.microsoft.com/office/drawing/2010/main" w="9525">
+                <a14:hiddenLine xmlns:a14="http://schemas.microsoft.com/office/drawing/2010/main" xmlns="" w="9525">
                   <a:solidFill>
                     <a:srgbClr val="000000"/>
                   </a:solidFill>
@@ -4950,7 +4950,7 @@
             </a:ln>
             <a:extLst>
               <a:ext uri="{91240B29-F687-4f45-9708-019B960494DF}">
-                <a14:hiddenLine xmlns="" xmlns:a14="http://schemas.microsoft.com/office/drawing/2010/main" w="9525">
+                <a14:hiddenLine xmlns:a14="http://schemas.microsoft.com/office/drawing/2010/main" xmlns="" w="9525">
                   <a:solidFill>
                     <a:srgbClr val="000000"/>
                   </a:solidFill>
@@ -5012,7 +5012,7 @@
             </a:ln>
             <a:extLst>
               <a:ext uri="{91240B29-F687-4f45-9708-019B960494DF}">
-                <a14:hiddenLine xmlns="" xmlns:a14="http://schemas.microsoft.com/office/drawing/2010/main" w="9525">
+                <a14:hiddenLine xmlns:a14="http://schemas.microsoft.com/office/drawing/2010/main" xmlns="" w="9525">
                   <a:solidFill>
                     <a:srgbClr val="000000"/>
                   </a:solidFill>
@@ -5102,7 +5102,7 @@
             </a:ln>
             <a:extLst>
               <a:ext uri="{91240B29-F687-4f45-9708-019B960494DF}">
-                <a14:hiddenLine xmlns="" xmlns:a14="http://schemas.microsoft.com/office/drawing/2010/main" w="9525">
+                <a14:hiddenLine xmlns:a14="http://schemas.microsoft.com/office/drawing/2010/main" xmlns="" w="9525">
                   <a:solidFill>
                     <a:srgbClr val="000000"/>
                   </a:solidFill>
@@ -5164,7 +5164,7 @@
             </a:ln>
             <a:extLst>
               <a:ext uri="{91240B29-F687-4f45-9708-019B960494DF}">
-                <a14:hiddenLine xmlns="" xmlns:a14="http://schemas.microsoft.com/office/drawing/2010/main" w="9525">
+                <a14:hiddenLine xmlns:a14="http://schemas.microsoft.com/office/drawing/2010/main" xmlns="" w="9525">
                   <a:solidFill>
                     <a:srgbClr val="000000"/>
                   </a:solidFill>
@@ -5254,7 +5254,7 @@
             </a:ln>
             <a:extLst>
               <a:ext uri="{91240B29-F687-4f45-9708-019B960494DF}">
-                <a14:hiddenLine xmlns="" xmlns:a14="http://schemas.microsoft.com/office/drawing/2010/main" w="9525">
+                <a14:hiddenLine xmlns:a14="http://schemas.microsoft.com/office/drawing/2010/main" xmlns="" w="9525">
                   <a:solidFill>
                     <a:srgbClr val="000000"/>
                   </a:solidFill>
@@ -5316,7 +5316,7 @@
             </a:ln>
             <a:extLst>
               <a:ext uri="{91240B29-F687-4f45-9708-019B960494DF}">
-                <a14:hiddenLine xmlns="" xmlns:a14="http://schemas.microsoft.com/office/drawing/2010/main" w="9525">
+                <a14:hiddenLine xmlns:a14="http://schemas.microsoft.com/office/drawing/2010/main" xmlns="" w="9525">
                   <a:solidFill>
                     <a:srgbClr val="000000"/>
                   </a:solidFill>
@@ -5406,7 +5406,7 @@
             </a:ln>
             <a:extLst>
               <a:ext uri="{91240B29-F687-4f45-9708-019B960494DF}">
-                <a14:hiddenLine xmlns="" xmlns:a14="http://schemas.microsoft.com/office/drawing/2010/main" w="9525">
+                <a14:hiddenLine xmlns:a14="http://schemas.microsoft.com/office/drawing/2010/main" xmlns="" w="9525">
                   <a:solidFill>
                     <a:srgbClr val="000000"/>
                   </a:solidFill>
@@ -5440,7 +5440,7 @@
             </a:ln>
             <a:extLst>
               <a:ext uri="{91240B29-F687-4f45-9708-019B960494DF}">
-                <a14:hiddenLine xmlns="" xmlns:a14="http://schemas.microsoft.com/office/drawing/2010/main" w="9525">
+                <a14:hiddenLine xmlns:a14="http://schemas.microsoft.com/office/drawing/2010/main" xmlns="" w="9525">
                   <a:solidFill>
                     <a:srgbClr val="000000"/>
                   </a:solidFill>
@@ -5505,7 +5505,7 @@
             </a:ln>
             <a:extLst>
               <a:ext uri="{91240B29-F687-4f45-9708-019B960494DF}">
-                <a14:hiddenLine xmlns="" xmlns:a14="http://schemas.microsoft.com/office/drawing/2010/main" w="9525">
+                <a14:hiddenLine xmlns:a14="http://schemas.microsoft.com/office/drawing/2010/main" xmlns="" w="9525">
                   <a:solidFill>
                     <a:srgbClr val="000000"/>
                   </a:solidFill>
@@ -5595,7 +5595,7 @@
             </a:ln>
             <a:extLst>
               <a:ext uri="{91240B29-F687-4f45-9708-019B960494DF}">
-                <a14:hiddenLine xmlns="" xmlns:a14="http://schemas.microsoft.com/office/drawing/2010/main" w="9525">
+                <a14:hiddenLine xmlns:a14="http://schemas.microsoft.com/office/drawing/2010/main" xmlns="" w="9525">
                   <a:solidFill>
                     <a:srgbClr val="000000"/>
                   </a:solidFill>
@@ -5657,7 +5657,7 @@
             </a:ln>
             <a:extLst>
               <a:ext uri="{91240B29-F687-4f45-9708-019B960494DF}">
-                <a14:hiddenLine xmlns="" xmlns:a14="http://schemas.microsoft.com/office/drawing/2010/main" w="9525">
+                <a14:hiddenLine xmlns:a14="http://schemas.microsoft.com/office/drawing/2010/main" xmlns="" w="9525">
                   <a:solidFill>
                     <a:srgbClr val="000000"/>
                   </a:solidFill>
@@ -5747,7 +5747,7 @@
             </a:ln>
             <a:extLst>
               <a:ext uri="{91240B29-F687-4f45-9708-019B960494DF}">
-                <a14:hiddenLine xmlns="" xmlns:a14="http://schemas.microsoft.com/office/drawing/2010/main" w="9525">
+                <a14:hiddenLine xmlns:a14="http://schemas.microsoft.com/office/drawing/2010/main" xmlns="" w="9525">
                   <a:solidFill>
                     <a:srgbClr val="000000"/>
                   </a:solidFill>
@@ -5837,7 +5837,7 @@
             </a:ln>
             <a:extLst>
               <a:ext uri="{91240B29-F687-4f45-9708-019B960494DF}">
-                <a14:hiddenLine xmlns="" xmlns:a14="http://schemas.microsoft.com/office/drawing/2010/main" w="9525">
+                <a14:hiddenLine xmlns:a14="http://schemas.microsoft.com/office/drawing/2010/main" xmlns="" w="9525">
                   <a:solidFill>
                     <a:srgbClr val="000000"/>
                   </a:solidFill>
@@ -5902,7 +5902,7 @@
             </a:ln>
             <a:extLst>
               <a:ext uri="{91240B29-F687-4f45-9708-019B960494DF}">
-                <a14:hiddenLine xmlns="" xmlns:a14="http://schemas.microsoft.com/office/drawing/2010/main" w="9525">
+                <a14:hiddenLine xmlns:a14="http://schemas.microsoft.com/office/drawing/2010/main" xmlns="" w="9525">
                   <a:solidFill>
                     <a:srgbClr val="000000"/>
                   </a:solidFill>
@@ -5964,7 +5964,7 @@
             </a:ln>
             <a:extLst>
               <a:ext uri="{91240B29-F687-4f45-9708-019B960494DF}">
-                <a14:hiddenLine xmlns="" xmlns:a14="http://schemas.microsoft.com/office/drawing/2010/main" w="9525">
+                <a14:hiddenLine xmlns:a14="http://schemas.microsoft.com/office/drawing/2010/main" xmlns="" w="9525">
                   <a:solidFill>
                     <a:srgbClr val="000000"/>
                   </a:solidFill>
@@ -6054,7 +6054,7 @@
             </a:ln>
             <a:extLst>
               <a:ext uri="{91240B29-F687-4f45-9708-019B960494DF}">
-                <a14:hiddenLine xmlns="" xmlns:a14="http://schemas.microsoft.com/office/drawing/2010/main" w="9525">
+                <a14:hiddenLine xmlns:a14="http://schemas.microsoft.com/office/drawing/2010/main" xmlns="" w="9525">
                   <a:solidFill>
                     <a:srgbClr val="000000"/>
                   </a:solidFill>
@@ -6144,7 +6144,7 @@
             </a:ln>
             <a:extLst>
               <a:ext uri="{91240B29-F687-4f45-9708-019B960494DF}">
-                <a14:hiddenLine xmlns="" xmlns:a14="http://schemas.microsoft.com/office/drawing/2010/main" w="9525">
+                <a14:hiddenLine xmlns:a14="http://schemas.microsoft.com/office/drawing/2010/main" xmlns="" w="9525">
                   <a:solidFill>
                     <a:srgbClr val="000000"/>
                   </a:solidFill>
@@ -6206,7 +6206,7 @@
             </a:ln>
             <a:extLst>
               <a:ext uri="{91240B29-F687-4f45-9708-019B960494DF}">
-                <a14:hiddenLine xmlns="" xmlns:a14="http://schemas.microsoft.com/office/drawing/2010/main" w="9525">
+                <a14:hiddenLine xmlns:a14="http://schemas.microsoft.com/office/drawing/2010/main" xmlns="" w="9525">
                   <a:solidFill>
                     <a:srgbClr val="000000"/>
                   </a:solidFill>
@@ -6326,7 +6326,7 @@
             </a:ln>
             <a:extLst>
               <a:ext uri="{91240B29-F687-4f45-9708-019B960494DF}">
-                <a14:hiddenLine xmlns="" xmlns:a14="http://schemas.microsoft.com/office/drawing/2010/main" w="9525">
+                <a14:hiddenLine xmlns:a14="http://schemas.microsoft.com/office/drawing/2010/main" xmlns="" w="9525">
                   <a:solidFill>
                     <a:srgbClr val="000000"/>
                   </a:solidFill>
@@ -6394,7 +6394,7 @@
             </a:ln>
             <a:extLst>
               <a:ext uri="{91240B29-F687-4f45-9708-019B960494DF}">
-                <a14:hiddenLine xmlns="" xmlns:a14="http://schemas.microsoft.com/office/drawing/2010/main" w="9525">
+                <a14:hiddenLine xmlns:a14="http://schemas.microsoft.com/office/drawing/2010/main" xmlns="" w="9525">
                   <a:solidFill>
                     <a:srgbClr val="000000"/>
                   </a:solidFill>
@@ -6484,7 +6484,7 @@
             </a:ln>
             <a:extLst>
               <a:ext uri="{91240B29-F687-4f45-9708-019B960494DF}">
-                <a14:hiddenLine xmlns="" xmlns:a14="http://schemas.microsoft.com/office/drawing/2010/main" w="9525">
+                <a14:hiddenLine xmlns:a14="http://schemas.microsoft.com/office/drawing/2010/main" xmlns="" w="9525">
                   <a:solidFill>
                     <a:srgbClr val="000000"/>
                   </a:solidFill>
@@ -6624,7 +6624,7 @@
           <a:p>
             <a:fld id="{99C194EE-FA60-F34D-86F8-966C052D377B}" type="datetime1">
               <a:rPr lang="en-US" smtClean="0"/>
-              <a:t>9/26/25</a:t>
+              <a:t>2/10/26</a:t>
             </a:fld>
             <a:endParaRPr lang="en-US"/>
           </a:p>
@@ -6891,7 +6891,7 @@
           <a:p>
             <a:fld id="{CEA70AF6-319A-5F40-9833-4B84B09CD206}" type="datetime1">
               <a:rPr lang="en-US" smtClean="0"/>
-              <a:t>9/26/25</a:t>
+              <a:t>2/10/26</a:t>
             </a:fld>
             <a:endParaRPr lang="en-US"/>
           </a:p>
@@ -7087,7 +7087,7 @@
           <a:p>
             <a:fld id="{E31E25DA-808D-D44E-B46C-CE2C1DC20748}" type="datetime1">
               <a:rPr lang="en-US" smtClean="0"/>
-              <a:t>9/26/25</a:t>
+              <a:t>2/10/26</a:t>
             </a:fld>
             <a:endParaRPr lang="en-US"/>
           </a:p>
@@ -7350,7 +7350,7 @@
           <a:p>
             <a:fld id="{A8F5BE9B-AD7A-984B-94FE-2F7F29A5BBF8}" type="datetime1">
               <a:rPr lang="en-US" smtClean="0"/>
-              <a:t>9/26/25</a:t>
+              <a:t>2/10/26</a:t>
             </a:fld>
             <a:endParaRPr lang="en-US"/>
           </a:p>
@@ -7784,7 +7784,7 @@
           <a:p>
             <a:fld id="{7E735745-726D-9046-9931-CD1599AD73F7}" type="datetime1">
               <a:rPr lang="en-US" smtClean="0"/>
-              <a:t>9/26/25</a:t>
+              <a:t>2/10/26</a:t>
             </a:fld>
             <a:endParaRPr lang="en-US"/>
           </a:p>
@@ -8330,7 +8330,7 @@
           <a:p>
             <a:fld id="{A787CF5C-AE42-BF48-A0B5-6B0B1C66B68B}" type="datetime1">
               <a:rPr lang="en-US" smtClean="0"/>
-              <a:t>9/26/25</a:t>
+              <a:t>2/10/26</a:t>
             </a:fld>
             <a:endParaRPr lang="en-US"/>
           </a:p>
@@ -9050,7 +9050,7 @@
           <a:p>
             <a:fld id="{E856B449-641C-BC41-821D-A63EBD8B29DA}" type="datetime1">
               <a:rPr lang="en-US" smtClean="0"/>
-              <a:t>9/26/25</a:t>
+              <a:t>2/10/26</a:t>
             </a:fld>
             <a:endParaRPr lang="en-US"/>
           </a:p>
@@ -9220,7 +9220,7 @@
           <a:p>
             <a:fld id="{44C15CF8-D751-264B-A1E9-AB57E56A64D6}" type="datetime1">
               <a:rPr lang="en-US" smtClean="0"/>
-              <a:t>9/26/25</a:t>
+              <a:t>2/10/26</a:t>
             </a:fld>
             <a:endParaRPr lang="en-US"/>
           </a:p>
@@ -9400,7 +9400,7 @@
           <a:p>
             <a:fld id="{380B80A9-66F6-784A-AE29-24D484B6929E}" type="datetime1">
               <a:rPr lang="en-US" smtClean="0"/>
-              <a:t>9/26/25</a:t>
+              <a:t>2/10/26</a:t>
             </a:fld>
             <a:endParaRPr lang="en-US"/>
           </a:p>
@@ -9570,7 +9570,7 @@
           <a:p>
             <a:fld id="{24D5B64A-21DB-1A49-8B83-7A247B6A00D7}" type="datetime1">
               <a:rPr lang="en-US" smtClean="0"/>
-              <a:t>9/26/25</a:t>
+              <a:t>2/10/26</a:t>
             </a:fld>
             <a:endParaRPr lang="en-US"/>
           </a:p>
@@ -9820,7 +9820,7 @@
           <a:p>
             <a:fld id="{57D5F905-A50D-4249-A0C4-91909633BBDD}" type="datetime1">
               <a:rPr lang="en-US" smtClean="0"/>
-              <a:t>9/26/25</a:t>
+              <a:t>2/10/26</a:t>
             </a:fld>
             <a:endParaRPr lang="en-US"/>
           </a:p>
@@ -10052,7 +10052,7 @@
           <a:p>
             <a:fld id="{E5EC99BB-53AF-A84C-9B6C-6C8C2DFEE567}" type="datetime1">
               <a:rPr lang="en-US" smtClean="0"/>
-              <a:t>9/26/25</a:t>
+              <a:t>2/10/26</a:t>
             </a:fld>
             <a:endParaRPr lang="en-US"/>
           </a:p>
@@ -10438,7 +10438,7 @@
           <a:p>
             <a:fld id="{6E4BCF23-BD3E-F444-8612-0E18B13F1EBE}" type="datetime1">
               <a:rPr lang="en-US" smtClean="0"/>
-              <a:t>9/26/25</a:t>
+              <a:t>2/10/26</a:t>
             </a:fld>
             <a:endParaRPr lang="en-US"/>
           </a:p>
@@ -10561,7 +10561,7 @@
           <a:p>
             <a:fld id="{22C5EB86-ACD1-CD49-B729-6BFA3C98D8C5}" type="datetime1">
               <a:rPr lang="en-US" smtClean="0"/>
-              <a:t>9/26/25</a:t>
+              <a:t>2/10/26</a:t>
             </a:fld>
             <a:endParaRPr lang="en-US"/>
           </a:p>
@@ -10656,7 +10656,7 @@
           <a:p>
             <a:fld id="{06E868A6-240C-9843-8C3B-5A9AB5369164}" type="datetime1">
               <a:rPr lang="en-US" smtClean="0"/>
-              <a:t>9/26/25</a:t>
+              <a:t>2/10/26</a:t>
             </a:fld>
             <a:endParaRPr lang="en-US"/>
           </a:p>
@@ -10905,7 +10905,7 @@
           <a:p>
             <a:fld id="{8995CC52-ECF4-5042-9C00-3AC23BCA8442}" type="datetime1">
               <a:rPr lang="en-US" smtClean="0"/>
-              <a:t>9/26/25</a:t>
+              <a:t>2/10/26</a:t>
             </a:fld>
             <a:endParaRPr lang="en-US"/>
           </a:p>
@@ -11190,7 +11190,7 @@
           <a:p>
             <a:fld id="{875A6050-3268-BA43-9E83-9F5CB0775FC6}" type="datetime1">
               <a:rPr lang="en-US" smtClean="0"/>
-              <a:t>9/26/25</a:t>
+              <a:t>2/10/26</a:t>
             </a:fld>
             <a:endParaRPr lang="en-US"/>
           </a:p>
@@ -11313,7 +11313,7 @@
           <a:noFill/>
           <a:extLst>
             <a:ext uri="{909E8E84-426E-40dd-AFC4-6F175D3DCCD1}">
-              <a14:hiddenFill xmlns="" xmlns:a14="http://schemas.microsoft.com/office/drawing/2010/main">
+              <a14:hiddenFill xmlns:a14="http://schemas.microsoft.com/office/drawing/2010/main" xmlns="">
                 <a:solidFill>
                   <a:srgbClr val="FFFFFF"/>
                 </a:solidFill>
@@ -11387,7 +11387,7 @@
               </a:ln>
               <a:extLst>
                 <a:ext uri="{91240B29-F687-4f45-9708-019B960494DF}">
-                  <a14:hiddenLine xmlns="" xmlns:a14="http://schemas.microsoft.com/office/drawing/2010/main" w="9525">
+                  <a14:hiddenLine xmlns:a14="http://schemas.microsoft.com/office/drawing/2010/main" xmlns="" w="9525">
                     <a:solidFill>
                       <a:srgbClr val="000000"/>
                     </a:solidFill>
@@ -11477,7 +11477,7 @@
               </a:ln>
               <a:extLst>
                 <a:ext uri="{91240B29-F687-4f45-9708-019B960494DF}">
-                  <a14:hiddenLine xmlns="" xmlns:a14="http://schemas.microsoft.com/office/drawing/2010/main" w="9525">
+                  <a14:hiddenLine xmlns:a14="http://schemas.microsoft.com/office/drawing/2010/main" xmlns="" w="9525">
                     <a:solidFill>
                       <a:srgbClr val="000000"/>
                     </a:solidFill>
@@ -11567,7 +11567,7 @@
               </a:ln>
               <a:extLst>
                 <a:ext uri="{91240B29-F687-4f45-9708-019B960494DF}">
-                  <a14:hiddenLine xmlns="" xmlns:a14="http://schemas.microsoft.com/office/drawing/2010/main" w="9525">
+                  <a14:hiddenLine xmlns:a14="http://schemas.microsoft.com/office/drawing/2010/main" xmlns="" w="9525">
                     <a:solidFill>
                       <a:srgbClr val="000000"/>
                     </a:solidFill>
@@ -11629,7 +11629,7 @@
               </a:ln>
               <a:extLst>
                 <a:ext uri="{91240B29-F687-4f45-9708-019B960494DF}">
-                  <a14:hiddenLine xmlns="" xmlns:a14="http://schemas.microsoft.com/office/drawing/2010/main" w="9525">
+                  <a14:hiddenLine xmlns:a14="http://schemas.microsoft.com/office/drawing/2010/main" xmlns="" w="9525">
                     <a:solidFill>
                       <a:srgbClr val="000000"/>
                     </a:solidFill>
@@ -11719,7 +11719,7 @@
               </a:ln>
               <a:extLst>
                 <a:ext uri="{91240B29-F687-4f45-9708-019B960494DF}">
-                  <a14:hiddenLine xmlns="" xmlns:a14="http://schemas.microsoft.com/office/drawing/2010/main" w="9525">
+                  <a14:hiddenLine xmlns:a14="http://schemas.microsoft.com/office/drawing/2010/main" xmlns="" w="9525">
                     <a:solidFill>
                       <a:srgbClr val="000000"/>
                     </a:solidFill>
@@ -11781,7 +11781,7 @@
               </a:ln>
               <a:extLst>
                 <a:ext uri="{91240B29-F687-4f45-9708-019B960494DF}">
-                  <a14:hiddenLine xmlns="" xmlns:a14="http://schemas.microsoft.com/office/drawing/2010/main" w="9525">
+                  <a14:hiddenLine xmlns:a14="http://schemas.microsoft.com/office/drawing/2010/main" xmlns="" w="9525">
                     <a:solidFill>
                       <a:srgbClr val="000000"/>
                     </a:solidFill>
@@ -11843,7 +11843,7 @@
               </a:ln>
               <a:extLst>
                 <a:ext uri="{91240B29-F687-4f45-9708-019B960494DF}">
-                  <a14:hiddenLine xmlns="" xmlns:a14="http://schemas.microsoft.com/office/drawing/2010/main" w="9525">
+                  <a14:hiddenLine xmlns:a14="http://schemas.microsoft.com/office/drawing/2010/main" xmlns="" w="9525">
                     <a:solidFill>
                       <a:srgbClr val="000000"/>
                     </a:solidFill>
@@ -11933,7 +11933,7 @@
               </a:ln>
               <a:extLst>
                 <a:ext uri="{91240B29-F687-4f45-9708-019B960494DF}">
-                  <a14:hiddenLine xmlns="" xmlns:a14="http://schemas.microsoft.com/office/drawing/2010/main" w="9525">
+                  <a14:hiddenLine xmlns:a14="http://schemas.microsoft.com/office/drawing/2010/main" xmlns="" w="9525">
                     <a:solidFill>
                       <a:srgbClr val="000000"/>
                     </a:solidFill>
@@ -12023,7 +12023,7 @@
               </a:ln>
               <a:extLst>
                 <a:ext uri="{91240B29-F687-4f45-9708-019B960494DF}">
-                  <a14:hiddenLine xmlns="" xmlns:a14="http://schemas.microsoft.com/office/drawing/2010/main" w="9525">
+                  <a14:hiddenLine xmlns:a14="http://schemas.microsoft.com/office/drawing/2010/main" xmlns="" w="9525">
                     <a:solidFill>
                       <a:srgbClr val="000000"/>
                     </a:solidFill>
@@ -12085,7 +12085,7 @@
               </a:ln>
               <a:extLst>
                 <a:ext uri="{91240B29-F687-4f45-9708-019B960494DF}">
-                  <a14:hiddenLine xmlns="" xmlns:a14="http://schemas.microsoft.com/office/drawing/2010/main" w="9525">
+                  <a14:hiddenLine xmlns:a14="http://schemas.microsoft.com/office/drawing/2010/main" xmlns="" w="9525">
                     <a:solidFill>
                       <a:srgbClr val="000000"/>
                     </a:solidFill>
@@ -12195,7 +12195,7 @@
               </a:ln>
               <a:extLst>
                 <a:ext uri="{91240B29-F687-4f45-9708-019B960494DF}">
-                  <a14:hiddenLine xmlns="" xmlns:a14="http://schemas.microsoft.com/office/drawing/2010/main" w="9525">
+                  <a14:hiddenLine xmlns:a14="http://schemas.microsoft.com/office/drawing/2010/main" xmlns="" w="9525">
                     <a:solidFill>
                       <a:srgbClr val="000000"/>
                     </a:solidFill>
@@ -12279,7 +12279,7 @@
               </a:ln>
               <a:extLst>
                 <a:ext uri="{91240B29-F687-4f45-9708-019B960494DF}">
-                  <a14:hiddenLine xmlns="" xmlns:a14="http://schemas.microsoft.com/office/drawing/2010/main" w="9525">
+                  <a14:hiddenLine xmlns:a14="http://schemas.microsoft.com/office/drawing/2010/main" xmlns="" w="9525">
                     <a:solidFill>
                       <a:srgbClr val="000000"/>
                     </a:solidFill>
@@ -12341,7 +12341,7 @@
               </a:ln>
               <a:extLst>
                 <a:ext uri="{91240B29-F687-4f45-9708-019B960494DF}">
-                  <a14:hiddenLine xmlns="" xmlns:a14="http://schemas.microsoft.com/office/drawing/2010/main" w="9525">
+                  <a14:hiddenLine xmlns:a14="http://schemas.microsoft.com/office/drawing/2010/main" xmlns="" w="9525">
                     <a:solidFill>
                       <a:srgbClr val="000000"/>
                     </a:solidFill>
@@ -12403,7 +12403,7 @@
               </a:ln>
               <a:extLst>
                 <a:ext uri="{91240B29-F687-4f45-9708-019B960494DF}">
-                  <a14:hiddenLine xmlns="" xmlns:a14="http://schemas.microsoft.com/office/drawing/2010/main" w="9525">
+                  <a14:hiddenLine xmlns:a14="http://schemas.microsoft.com/office/drawing/2010/main" xmlns="" w="9525">
                     <a:solidFill>
                       <a:srgbClr val="000000"/>
                     </a:solidFill>
@@ -12493,7 +12493,7 @@
               </a:ln>
               <a:extLst>
                 <a:ext uri="{91240B29-F687-4f45-9708-019B960494DF}">
-                  <a14:hiddenLine xmlns="" xmlns:a14="http://schemas.microsoft.com/office/drawing/2010/main" w="9525">
+                  <a14:hiddenLine xmlns:a14="http://schemas.microsoft.com/office/drawing/2010/main" xmlns="" w="9525">
                     <a:solidFill>
                       <a:srgbClr val="000000"/>
                     </a:solidFill>
@@ -12527,7 +12527,7 @@
               </a:ln>
               <a:extLst>
                 <a:ext uri="{91240B29-F687-4f45-9708-019B960494DF}">
-                  <a14:hiddenLine xmlns="" xmlns:a14="http://schemas.microsoft.com/office/drawing/2010/main" w="9525">
+                  <a14:hiddenLine xmlns:a14="http://schemas.microsoft.com/office/drawing/2010/main" xmlns="" w="9525">
                     <a:solidFill>
                       <a:srgbClr val="000000"/>
                     </a:solidFill>
@@ -12592,7 +12592,7 @@
               </a:ln>
               <a:extLst>
                 <a:ext uri="{91240B29-F687-4f45-9708-019B960494DF}">
-                  <a14:hiddenLine xmlns="" xmlns:a14="http://schemas.microsoft.com/office/drawing/2010/main" w="9525">
+                  <a14:hiddenLine xmlns:a14="http://schemas.microsoft.com/office/drawing/2010/main" xmlns="" w="9525">
                     <a:solidFill>
                       <a:srgbClr val="000000"/>
                     </a:solidFill>
@@ -12682,7 +12682,7 @@
               </a:ln>
               <a:extLst>
                 <a:ext uri="{91240B29-F687-4f45-9708-019B960494DF}">
-                  <a14:hiddenLine xmlns="" xmlns:a14="http://schemas.microsoft.com/office/drawing/2010/main" w="9525">
+                  <a14:hiddenLine xmlns:a14="http://schemas.microsoft.com/office/drawing/2010/main" xmlns="" w="9525">
                     <a:solidFill>
                       <a:srgbClr val="000000"/>
                     </a:solidFill>
@@ -12744,7 +12744,7 @@
               </a:ln>
               <a:extLst>
                 <a:ext uri="{91240B29-F687-4f45-9708-019B960494DF}">
-                  <a14:hiddenLine xmlns="" xmlns:a14="http://schemas.microsoft.com/office/drawing/2010/main" w="9525">
+                  <a14:hiddenLine xmlns:a14="http://schemas.microsoft.com/office/drawing/2010/main" xmlns="" w="9525">
                     <a:solidFill>
                       <a:srgbClr val="000000"/>
                     </a:solidFill>
@@ -12834,7 +12834,7 @@
               </a:ln>
               <a:extLst>
                 <a:ext uri="{91240B29-F687-4f45-9708-019B960494DF}">
-                  <a14:hiddenLine xmlns="" xmlns:a14="http://schemas.microsoft.com/office/drawing/2010/main" w="9525">
+                  <a14:hiddenLine xmlns:a14="http://schemas.microsoft.com/office/drawing/2010/main" xmlns="" w="9525">
                     <a:solidFill>
                       <a:srgbClr val="000000"/>
                     </a:solidFill>
@@ -12899,7 +12899,7 @@
               </a:ln>
               <a:extLst>
                 <a:ext uri="{91240B29-F687-4f45-9708-019B960494DF}">
-                  <a14:hiddenLine xmlns="" xmlns:a14="http://schemas.microsoft.com/office/drawing/2010/main" w="9525">
+                  <a14:hiddenLine xmlns:a14="http://schemas.microsoft.com/office/drawing/2010/main" xmlns="" w="9525">
                     <a:solidFill>
                       <a:srgbClr val="000000"/>
                     </a:solidFill>
@@ -12961,7 +12961,7 @@
               </a:ln>
               <a:extLst>
                 <a:ext uri="{91240B29-F687-4f45-9708-019B960494DF}">
-                  <a14:hiddenLine xmlns="" xmlns:a14="http://schemas.microsoft.com/office/drawing/2010/main" w="9525">
+                  <a14:hiddenLine xmlns:a14="http://schemas.microsoft.com/office/drawing/2010/main" xmlns="" w="9525">
                     <a:solidFill>
                       <a:srgbClr val="000000"/>
                     </a:solidFill>
@@ -13051,7 +13051,7 @@
               </a:ln>
               <a:extLst>
                 <a:ext uri="{91240B29-F687-4f45-9708-019B960494DF}">
-                  <a14:hiddenLine xmlns="" xmlns:a14="http://schemas.microsoft.com/office/drawing/2010/main" w="9525">
+                  <a14:hiddenLine xmlns:a14="http://schemas.microsoft.com/office/drawing/2010/main" xmlns="" w="9525">
                     <a:solidFill>
                       <a:srgbClr val="000000"/>
                     </a:solidFill>
@@ -13141,7 +13141,7 @@
               </a:ln>
               <a:extLst>
                 <a:ext uri="{91240B29-F687-4f45-9708-019B960494DF}">
-                  <a14:hiddenLine xmlns="" xmlns:a14="http://schemas.microsoft.com/office/drawing/2010/main" w="9525">
+                  <a14:hiddenLine xmlns:a14="http://schemas.microsoft.com/office/drawing/2010/main" xmlns="" w="9525">
                     <a:solidFill>
                       <a:srgbClr val="000000"/>
                     </a:solidFill>
@@ -13206,7 +13206,7 @@
               </a:ln>
               <a:extLst>
                 <a:ext uri="{91240B29-F687-4f45-9708-019B960494DF}">
-                  <a14:hiddenLine xmlns="" xmlns:a14="http://schemas.microsoft.com/office/drawing/2010/main" w="9525">
+                  <a14:hiddenLine xmlns:a14="http://schemas.microsoft.com/office/drawing/2010/main" xmlns="" w="9525">
                     <a:solidFill>
                       <a:srgbClr val="000000"/>
                     </a:solidFill>
@@ -13326,7 +13326,7 @@
               </a:ln>
               <a:extLst>
                 <a:ext uri="{91240B29-F687-4f45-9708-019B960494DF}">
-                  <a14:hiddenLine xmlns="" xmlns:a14="http://schemas.microsoft.com/office/drawing/2010/main" w="9525">
+                  <a14:hiddenLine xmlns:a14="http://schemas.microsoft.com/office/drawing/2010/main" xmlns="" w="9525">
                     <a:solidFill>
                       <a:srgbClr val="000000"/>
                     </a:solidFill>
@@ -13407,7 +13407,7 @@
               </a:ln>
               <a:extLst>
                 <a:ext uri="{91240B29-F687-4f45-9708-019B960494DF}">
-                  <a14:hiddenLine xmlns="" xmlns:a14="http://schemas.microsoft.com/office/drawing/2010/main" w="9525">
+                  <a14:hiddenLine xmlns:a14="http://schemas.microsoft.com/office/drawing/2010/main" xmlns="" w="9525">
                     <a:solidFill>
                       <a:srgbClr val="000000"/>
                     </a:solidFill>
@@ -13522,7 +13522,7 @@
               </a:ln>
               <a:extLst>
                 <a:ext uri="{91240B29-F687-4f45-9708-019B960494DF}">
-                  <a14:hiddenLine xmlns="" xmlns:a14="http://schemas.microsoft.com/office/drawing/2010/main" w="9525">
+                  <a14:hiddenLine xmlns:a14="http://schemas.microsoft.com/office/drawing/2010/main" xmlns="" w="9525">
                     <a:solidFill>
                       <a:srgbClr val="000000"/>
                     </a:solidFill>
@@ -13612,7 +13612,7 @@
               </a:ln>
               <a:extLst>
                 <a:ext uri="{91240B29-F687-4f45-9708-019B960494DF}">
-                  <a14:hiddenLine xmlns="" xmlns:a14="http://schemas.microsoft.com/office/drawing/2010/main" w="9525">
+                  <a14:hiddenLine xmlns:a14="http://schemas.microsoft.com/office/drawing/2010/main" xmlns="" w="9525">
                     <a:solidFill>
                       <a:srgbClr val="000000"/>
                     </a:solidFill>
@@ -13677,7 +13677,7 @@
               </a:ln>
               <a:extLst>
                 <a:ext uri="{91240B29-F687-4f45-9708-019B960494DF}">
-                  <a14:hiddenLine xmlns="" xmlns:a14="http://schemas.microsoft.com/office/drawing/2010/main" w="9525">
+                  <a14:hiddenLine xmlns:a14="http://schemas.microsoft.com/office/drawing/2010/main" xmlns="" w="9525">
                     <a:solidFill>
                       <a:srgbClr val="000000"/>
                     </a:solidFill>
@@ -13767,7 +13767,7 @@
               </a:ln>
               <a:extLst>
                 <a:ext uri="{91240B29-F687-4f45-9708-019B960494DF}">
-                  <a14:hiddenLine xmlns="" xmlns:a14="http://schemas.microsoft.com/office/drawing/2010/main" w="9525">
+                  <a14:hiddenLine xmlns:a14="http://schemas.microsoft.com/office/drawing/2010/main" xmlns="" w="9525">
                     <a:solidFill>
                       <a:srgbClr val="000000"/>
                     </a:solidFill>
@@ -13835,7 +13835,7 @@
               </a:ln>
               <a:extLst>
                 <a:ext uri="{91240B29-F687-4f45-9708-019B960494DF}">
-                  <a14:hiddenLine xmlns="" xmlns:a14="http://schemas.microsoft.com/office/drawing/2010/main" w="9525">
+                  <a14:hiddenLine xmlns:a14="http://schemas.microsoft.com/office/drawing/2010/main" xmlns="" w="9525">
                     <a:solidFill>
                       <a:srgbClr val="000000"/>
                     </a:solidFill>
@@ -13925,7 +13925,7 @@
               </a:ln>
               <a:extLst>
                 <a:ext uri="{91240B29-F687-4f45-9708-019B960494DF}">
-                  <a14:hiddenLine xmlns="" xmlns:a14="http://schemas.microsoft.com/office/drawing/2010/main" w="9525">
+                  <a14:hiddenLine xmlns:a14="http://schemas.microsoft.com/office/drawing/2010/main" xmlns="" w="9525">
                     <a:solidFill>
                       <a:srgbClr val="000000"/>
                     </a:solidFill>
@@ -13993,7 +13993,7 @@
               </a:ln>
               <a:extLst>
                 <a:ext uri="{91240B29-F687-4f45-9708-019B960494DF}">
-                  <a14:hiddenLine xmlns="" xmlns:a14="http://schemas.microsoft.com/office/drawing/2010/main" w="9525">
+                  <a14:hiddenLine xmlns:a14="http://schemas.microsoft.com/office/drawing/2010/main" xmlns="" w="9525">
                     <a:solidFill>
                       <a:srgbClr val="000000"/>
                     </a:solidFill>
@@ -14083,7 +14083,7 @@
               </a:ln>
               <a:extLst>
                 <a:ext uri="{91240B29-F687-4f45-9708-019B960494DF}">
-                  <a14:hiddenLine xmlns="" xmlns:a14="http://schemas.microsoft.com/office/drawing/2010/main" w="9525">
+                  <a14:hiddenLine xmlns:a14="http://schemas.microsoft.com/office/drawing/2010/main" xmlns="" w="9525">
                     <a:solidFill>
                       <a:srgbClr val="000000"/>
                     </a:solidFill>
@@ -14117,7 +14117,7 @@
               </a:ln>
               <a:extLst>
                 <a:ext uri="{91240B29-F687-4f45-9708-019B960494DF}">
-                  <a14:hiddenLine xmlns="" xmlns:a14="http://schemas.microsoft.com/office/drawing/2010/main" w="9525">
+                  <a14:hiddenLine xmlns:a14="http://schemas.microsoft.com/office/drawing/2010/main" xmlns="" w="9525">
                     <a:solidFill>
                       <a:srgbClr val="000000"/>
                     </a:solidFill>
@@ -14257,7 +14257,7 @@
           <a:p>
             <a:fld id="{E6C8EED1-372D-8A44-BBA9-4B4EE45DC7FD}" type="datetime1">
               <a:rPr lang="en-US" smtClean="0"/>
-              <a:t>9/26/25</a:t>
+              <a:t>2/10/26</a:t>
             </a:fld>
             <a:endParaRPr lang="en-US"/>
           </a:p>
@@ -14932,8 +14932,8 @@
           </a:p>
         </p:txBody>
       </p:sp>
-      <mc:AlternateContent xmlns:mc="http://schemas.openxmlformats.org/markup-compatibility/2006" xmlns:a14="http://schemas.microsoft.com/office/drawing/2010/main">
-        <mc:Choice Requires="a14">
+      <mc:AlternateContent xmlns:mc="http://schemas.openxmlformats.org/markup-compatibility/2006">
+        <mc:Choice xmlns:a14="http://schemas.microsoft.com/office/drawing/2010/main" Requires="a14">
           <p:sp>
             <p:nvSpPr>
               <p:cNvPr id="2" name="TextBox 1">
@@ -15033,7 +15033,10 @@
                           <m:r>
                             <a:rPr lang="en-US" sz="2800" b="0" i="1" smtClean="0">
                               <a:solidFill>
-                                <a:schemeClr val="accent3"/>
+                                <a:schemeClr val="accent3">
+                                  <a:lumMod val="60000"/>
+                                  <a:lumOff val="40000"/>
+                                </a:schemeClr>
                               </a:solidFill>
                               <a:latin typeface="Cambria Math" panose="02040503050406030204" pitchFamily="18" charset="0"/>
                             </a:rPr>
@@ -15138,7 +15141,10 @@
                           <m:r>
                             <a:rPr lang="en-US" sz="2800" b="0" i="1" smtClean="0">
                               <a:solidFill>
-                                <a:schemeClr val="accent1"/>
+                                <a:schemeClr val="accent1">
+                                  <a:lumMod val="60000"/>
+                                  <a:lumOff val="40000"/>
+                                </a:schemeClr>
                               </a:solidFill>
                               <a:latin typeface="Cambria Math" panose="02040503050406030204" pitchFamily="18" charset="0"/>
                             </a:rPr>
@@ -15147,7 +15153,10 @@
                           <m:r>
                             <a:rPr lang="en-US" sz="2800" b="0" i="1" smtClean="0">
                               <a:solidFill>
-                                <a:schemeClr val="accent1"/>
+                                <a:schemeClr val="accent1">
+                                  <a:lumMod val="60000"/>
+                                  <a:lumOff val="40000"/>
+                                </a:schemeClr>
                               </a:solidFill>
                               <a:latin typeface="Cambria Math" panose="02040503050406030204" pitchFamily="18" charset="0"/>
                             </a:rPr>
@@ -15156,7 +15165,10 @@
                           <m:r>
                             <a:rPr lang="en-US" sz="2800" b="0" i="1" smtClean="0">
                               <a:solidFill>
-                                <a:schemeClr val="accent1"/>
+                                <a:schemeClr val="accent1">
+                                  <a:lumMod val="60000"/>
+                                  <a:lumOff val="40000"/>
+                                </a:schemeClr>
                               </a:solidFill>
                               <a:latin typeface="Cambria Math" panose="02040503050406030204" pitchFamily="18" charset="0"/>
                             </a:rPr>
@@ -15178,7 +15190,10 @@
                       <m:r>
                         <a:rPr lang="en-US" sz="2800" b="0" i="1" smtClean="0">
                           <a:solidFill>
-                            <a:schemeClr val="accent3"/>
+                            <a:schemeClr val="accent3">
+                              <a:lumMod val="60000"/>
+                              <a:lumOff val="40000"/>
+                            </a:schemeClr>
                           </a:solidFill>
                           <a:latin typeface="Cambria Math" panose="02040503050406030204" pitchFamily="18" charset="0"/>
                         </a:rPr>
@@ -15198,7 +15213,7 @@
             </p:txBody>
           </p:sp>
         </mc:Choice>
-        <mc:Fallback xmlns="">
+        <mc:Fallback>
           <p:sp>
             <p:nvSpPr>
               <p:cNvPr id="2" name="TextBox 1">
@@ -15316,7 +15331,10 @@
           <a:noFill/>
           <a:ln>
             <a:solidFill>
-              <a:schemeClr val="accent3"/>
+              <a:schemeClr val="accent3">
+                <a:lumMod val="60000"/>
+                <a:lumOff val="40000"/>
+              </a:schemeClr>
             </a:solidFill>
           </a:ln>
         </p:spPr>
@@ -15402,7 +15420,10 @@
           <a:noFill/>
           <a:ln>
             <a:solidFill>
-              <a:schemeClr val="accent1"/>
+              <a:schemeClr val="accent1">
+                <a:lumMod val="60000"/>
+                <a:lumOff val="40000"/>
+              </a:schemeClr>
             </a:solidFill>
           </a:ln>
         </p:spPr>
@@ -16127,8 +16148,8 @@
           </a:p>
         </p:txBody>
       </p:sp>
-      <mc:AlternateContent xmlns:mc="http://schemas.openxmlformats.org/markup-compatibility/2006" xmlns:a14="http://schemas.microsoft.com/office/drawing/2010/main">
-        <mc:Choice Requires="a14">
+      <mc:AlternateContent xmlns:mc="http://schemas.openxmlformats.org/markup-compatibility/2006">
+        <mc:Choice xmlns:a14="http://schemas.microsoft.com/office/drawing/2010/main" Requires="a14">
           <p:sp>
             <p:nvSpPr>
               <p:cNvPr id="2" name="TextBox 1">
@@ -16228,7 +16249,10 @@
                           <m:r>
                             <a:rPr lang="en-US" sz="2800" b="0" i="1" smtClean="0">
                               <a:solidFill>
-                                <a:schemeClr val="accent3"/>
+                                <a:schemeClr val="accent3">
+                                  <a:lumMod val="60000"/>
+                                  <a:lumOff val="40000"/>
+                                </a:schemeClr>
                               </a:solidFill>
                               <a:latin typeface="Cambria Math" panose="02040503050406030204" pitchFamily="18" charset="0"/>
                             </a:rPr>
@@ -16333,7 +16357,10 @@
                           <m:r>
                             <a:rPr lang="en-US" sz="2800" b="0" i="1" smtClean="0">
                               <a:solidFill>
-                                <a:schemeClr val="accent1"/>
+                                <a:schemeClr val="accent1">
+                                  <a:lumMod val="60000"/>
+                                  <a:lumOff val="40000"/>
+                                </a:schemeClr>
                               </a:solidFill>
                               <a:latin typeface="Cambria Math" panose="02040503050406030204" pitchFamily="18" charset="0"/>
                             </a:rPr>
@@ -16342,7 +16369,10 @@
                           <m:r>
                             <a:rPr lang="en-US" sz="2800" b="0" i="1" smtClean="0">
                               <a:solidFill>
-                                <a:schemeClr val="accent1"/>
+                                <a:schemeClr val="accent1">
+                                  <a:lumMod val="60000"/>
+                                  <a:lumOff val="40000"/>
+                                </a:schemeClr>
                               </a:solidFill>
                               <a:latin typeface="Cambria Math" panose="02040503050406030204" pitchFamily="18" charset="0"/>
                             </a:rPr>
@@ -16351,7 +16381,10 @@
                           <m:r>
                             <a:rPr lang="en-US" sz="2800" b="0" i="1" smtClean="0">
                               <a:solidFill>
-                                <a:schemeClr val="accent1"/>
+                                <a:schemeClr val="accent1">
+                                  <a:lumMod val="60000"/>
+                                  <a:lumOff val="40000"/>
+                                </a:schemeClr>
                               </a:solidFill>
                               <a:latin typeface="Cambria Math" panose="02040503050406030204" pitchFamily="18" charset="0"/>
                             </a:rPr>
@@ -16373,7 +16406,10 @@
                       <m:r>
                         <a:rPr lang="en-US" sz="2800" b="0" i="1" smtClean="0">
                           <a:solidFill>
-                            <a:schemeClr val="accent3"/>
+                            <a:schemeClr val="accent3">
+                              <a:lumMod val="60000"/>
+                              <a:lumOff val="40000"/>
+                            </a:schemeClr>
                           </a:solidFill>
                           <a:latin typeface="Cambria Math" panose="02040503050406030204" pitchFamily="18" charset="0"/>
                         </a:rPr>
@@ -16393,7 +16429,7 @@
             </p:txBody>
           </p:sp>
         </mc:Choice>
-        <mc:Fallback xmlns="">
+        <mc:Fallback>
           <p:sp>
             <p:nvSpPr>
               <p:cNvPr id="2" name="TextBox 1">
@@ -16513,7 +16549,10 @@
           <a:noFill/>
           <a:ln>
             <a:solidFill>
-              <a:schemeClr val="accent3"/>
+              <a:schemeClr val="accent3">
+                <a:lumMod val="60000"/>
+                <a:lumOff val="40000"/>
+              </a:schemeClr>
             </a:solidFill>
           </a:ln>
         </p:spPr>
@@ -16599,7 +16638,10 @@
           <a:noFill/>
           <a:ln>
             <a:solidFill>
-              <a:schemeClr val="accent1"/>
+              <a:schemeClr val="accent1">
+                <a:lumMod val="60000"/>
+                <a:lumOff val="40000"/>
+              </a:schemeClr>
             </a:solidFill>
           </a:ln>
         </p:spPr>
@@ -17147,8 +17189,8 @@
           </p:txBody>
         </p:sp>
       </p:grpSp>
-      <mc:AlternateContent xmlns:mc="http://schemas.openxmlformats.org/markup-compatibility/2006" xmlns:a14="http://schemas.microsoft.com/office/drawing/2010/main">
-        <mc:Choice Requires="a14">
+      <mc:AlternateContent xmlns:mc="http://schemas.openxmlformats.org/markup-compatibility/2006">
+        <mc:Choice xmlns:a14="http://schemas.microsoft.com/office/drawing/2010/main" Requires="a14">
           <p:sp>
             <p:nvSpPr>
               <p:cNvPr id="12" name="TextBox 11">
@@ -17314,7 +17356,10 @@
                       <m:r>
                         <a:rPr lang="en-US" sz="2800" b="0" i="1" smtClean="0">
                           <a:solidFill>
-                            <a:schemeClr val="accent3"/>
+                            <a:schemeClr val="accent3">
+                              <a:lumMod val="60000"/>
+                              <a:lumOff val="40000"/>
+                            </a:schemeClr>
                           </a:solidFill>
                           <a:latin typeface="Cambria Math" panose="02040503050406030204" pitchFamily="18" charset="0"/>
                         </a:rPr>
@@ -17335,7 +17380,10 @@
                         <a:rPr lang="en-US" sz="2800" i="1" smtClean="0">
                           <a:ln w="0"/>
                           <a:solidFill>
-                            <a:schemeClr val="accent1"/>
+                            <a:schemeClr val="accent1">
+                              <a:lumMod val="60000"/>
+                              <a:lumOff val="40000"/>
+                            </a:schemeClr>
                           </a:solidFill>
                           <a:effectLst>
                             <a:outerShdw blurRad="38100" dist="25400" dir="5400000" algn="ctr" rotWithShape="0">
@@ -17352,7 +17400,10 @@
                         <a:rPr lang="en-US" sz="2800" i="1" smtClean="0">
                           <a:ln w="0"/>
                           <a:solidFill>
-                            <a:schemeClr val="accent1"/>
+                            <a:schemeClr val="accent1">
+                              <a:lumMod val="60000"/>
+                              <a:lumOff val="40000"/>
+                            </a:schemeClr>
                           </a:solidFill>
                           <a:effectLst>
                             <a:outerShdw blurRad="38100" dist="25400" dir="5400000" algn="ctr" rotWithShape="0">
@@ -17369,7 +17420,10 @@
                         <a:rPr lang="en-US" sz="2800" i="1" smtClean="0">
                           <a:ln w="0"/>
                           <a:solidFill>
-                            <a:schemeClr val="accent1"/>
+                            <a:schemeClr val="accent1">
+                              <a:lumMod val="60000"/>
+                              <a:lumOff val="40000"/>
+                            </a:schemeClr>
                           </a:solidFill>
                           <a:effectLst>
                             <a:outerShdw blurRad="38100" dist="25400" dir="5400000" algn="ctr" rotWithShape="0">
@@ -17396,7 +17450,10 @@
                       <m:r>
                         <a:rPr lang="en-US" sz="2800" b="0" i="1" smtClean="0">
                           <a:solidFill>
-                            <a:schemeClr val="accent3"/>
+                            <a:schemeClr val="accent3">
+                              <a:lumMod val="60000"/>
+                              <a:lumOff val="40000"/>
+                            </a:schemeClr>
                           </a:solidFill>
                           <a:latin typeface="Cambria Math" panose="02040503050406030204" pitchFamily="18" charset="0"/>
                         </a:rPr>
@@ -17416,7 +17473,7 @@
             </p:txBody>
           </p:sp>
         </mc:Choice>
-        <mc:Fallback xmlns="">
+        <mc:Fallback>
           <p:sp>
             <p:nvSpPr>
               <p:cNvPr id="12" name="TextBox 11">
@@ -17645,8 +17702,8 @@
           </a:p>
         </p:txBody>
       </p:sp>
-      <mc:AlternateContent xmlns:mc="http://schemas.openxmlformats.org/markup-compatibility/2006" xmlns:a14="http://schemas.microsoft.com/office/drawing/2010/main">
-        <mc:Choice Requires="a14">
+      <mc:AlternateContent xmlns:mc="http://schemas.openxmlformats.org/markup-compatibility/2006">
+        <mc:Choice xmlns:a14="http://schemas.microsoft.com/office/drawing/2010/main" Requires="a14">
           <p:sp>
             <p:nvSpPr>
               <p:cNvPr id="2" name="TextBox 1">
@@ -17746,7 +17803,10 @@
                           <m:r>
                             <a:rPr lang="en-US" sz="2800" b="0" i="1" smtClean="0">
                               <a:solidFill>
-                                <a:schemeClr val="accent3"/>
+                                <a:schemeClr val="accent3">
+                                  <a:lumMod val="60000"/>
+                                  <a:lumOff val="40000"/>
+                                </a:schemeClr>
                               </a:solidFill>
                               <a:latin typeface="Cambria Math" panose="02040503050406030204" pitchFamily="18" charset="0"/>
                             </a:rPr>
@@ -17851,7 +17911,10 @@
                           <m:r>
                             <a:rPr lang="en-US" sz="2800" b="0" i="1" smtClean="0">
                               <a:solidFill>
-                                <a:schemeClr val="accent1"/>
+                                <a:schemeClr val="accent1">
+                                  <a:lumMod val="60000"/>
+                                  <a:lumOff val="40000"/>
+                                </a:schemeClr>
                               </a:solidFill>
                               <a:latin typeface="Cambria Math" panose="02040503050406030204" pitchFamily="18" charset="0"/>
                             </a:rPr>
@@ -17860,7 +17923,10 @@
                           <m:r>
                             <a:rPr lang="en-US" sz="2800" b="0" i="1" smtClean="0">
                               <a:solidFill>
-                                <a:schemeClr val="accent1"/>
+                                <a:schemeClr val="accent1">
+                                  <a:lumMod val="60000"/>
+                                  <a:lumOff val="40000"/>
+                                </a:schemeClr>
                               </a:solidFill>
                               <a:latin typeface="Cambria Math" panose="02040503050406030204" pitchFamily="18" charset="0"/>
                             </a:rPr>
@@ -17869,7 +17935,10 @@
                           <m:r>
                             <a:rPr lang="en-US" sz="2800" b="0" i="1" smtClean="0">
                               <a:solidFill>
-                                <a:schemeClr val="accent1"/>
+                                <a:schemeClr val="accent1">
+                                  <a:lumMod val="60000"/>
+                                  <a:lumOff val="40000"/>
+                                </a:schemeClr>
                               </a:solidFill>
                               <a:latin typeface="Cambria Math" panose="02040503050406030204" pitchFamily="18" charset="0"/>
                             </a:rPr>
@@ -17891,7 +17960,10 @@
                       <m:r>
                         <a:rPr lang="en-US" sz="2800" b="0" i="1" smtClean="0">
                           <a:solidFill>
-                            <a:schemeClr val="accent3"/>
+                            <a:schemeClr val="accent3">
+                              <a:lumMod val="60000"/>
+                              <a:lumOff val="40000"/>
+                            </a:schemeClr>
                           </a:solidFill>
                           <a:latin typeface="Cambria Math" panose="02040503050406030204" pitchFamily="18" charset="0"/>
                         </a:rPr>
@@ -17911,7 +17983,7 @@
             </p:txBody>
           </p:sp>
         </mc:Choice>
-        <mc:Fallback xmlns="">
+        <mc:Fallback>
           <p:sp>
             <p:nvSpPr>
               <p:cNvPr id="2" name="TextBox 1">
@@ -18577,8 +18649,8 @@
           </p:txBody>
         </p:sp>
       </p:grpSp>
-      <mc:AlternateContent xmlns:mc="http://schemas.openxmlformats.org/markup-compatibility/2006" xmlns:a14="http://schemas.microsoft.com/office/drawing/2010/main">
-        <mc:Choice Requires="a14">
+      <mc:AlternateContent xmlns:mc="http://schemas.openxmlformats.org/markup-compatibility/2006">
+        <mc:Choice xmlns:a14="http://schemas.microsoft.com/office/drawing/2010/main" Requires="a14">
           <p:sp>
             <p:nvSpPr>
               <p:cNvPr id="12" name="TextBox 11">
@@ -18626,7 +18698,10 @@
                           <m:ctrlPr>
                             <a:rPr lang="en-US" sz="2800" b="0" i="1" smtClean="0">
                               <a:solidFill>
-                                <a:schemeClr val="accent5"/>
+                                <a:schemeClr val="accent5">
+                                  <a:lumMod val="60000"/>
+                                  <a:lumOff val="40000"/>
+                                </a:schemeClr>
                               </a:solidFill>
                               <a:latin typeface="Cambria Math" panose="02040503050406030204" pitchFamily="18" charset="0"/>
                             </a:rPr>
@@ -18636,7 +18711,10 @@
                           <m:r>
                             <a:rPr lang="en-US" sz="2800" b="0" i="1" smtClean="0">
                               <a:solidFill>
-                                <a:schemeClr val="accent5"/>
+                                <a:schemeClr val="accent5">
+                                  <a:lumMod val="60000"/>
+                                  <a:lumOff val="40000"/>
+                                </a:schemeClr>
                               </a:solidFill>
                               <a:latin typeface="Cambria Math" panose="02040503050406030204" pitchFamily="18" charset="0"/>
                             </a:rPr>
@@ -18645,7 +18723,10 @@
                           <m:r>
                             <a:rPr lang="en-US" sz="2800" b="0" i="1" smtClean="0">
                               <a:solidFill>
-                                <a:schemeClr val="accent5"/>
+                                <a:schemeClr val="accent5">
+                                  <a:lumMod val="60000"/>
+                                  <a:lumOff val="40000"/>
+                                </a:schemeClr>
                               </a:solidFill>
                               <a:latin typeface="Cambria Math" panose="02040503050406030204" pitchFamily="18" charset="0"/>
                             </a:rPr>
@@ -18654,7 +18735,10 @@
                           <m:r>
                             <a:rPr lang="en-US" sz="2800" b="0" i="1" smtClean="0">
                               <a:solidFill>
-                                <a:schemeClr val="accent5"/>
+                                <a:schemeClr val="accent5">
+                                  <a:lumMod val="60000"/>
+                                  <a:lumOff val="40000"/>
+                                </a:schemeClr>
                               </a:solidFill>
                               <a:latin typeface="Cambria Math" panose="02040503050406030204" pitchFamily="18" charset="0"/>
                             </a:rPr>
@@ -18665,7 +18749,10 @@
                       <m:r>
                         <a:rPr lang="en-US" sz="2800" b="0" i="1" smtClean="0">
                           <a:solidFill>
-                            <a:schemeClr val="accent5"/>
+                            <a:schemeClr val="accent5">
+                              <a:lumMod val="60000"/>
+                              <a:lumOff val="40000"/>
+                            </a:schemeClr>
                           </a:solidFill>
                           <a:latin typeface="Cambria Math" panose="02040503050406030204" pitchFamily="18" charset="0"/>
                         </a:rPr>
@@ -18676,7 +18763,10 @@
                           <m:ctrlPr>
                             <a:rPr lang="en-US" sz="2800" b="0" i="1" smtClean="0">
                               <a:solidFill>
-                                <a:schemeClr val="accent5"/>
+                                <a:schemeClr val="accent5">
+                                  <a:lumMod val="60000"/>
+                                  <a:lumOff val="40000"/>
+                                </a:schemeClr>
                               </a:solidFill>
                               <a:latin typeface="Cambria Math" panose="02040503050406030204" pitchFamily="18" charset="0"/>
                             </a:rPr>
@@ -18686,7 +18776,10 @@
                           <m:r>
                             <a:rPr lang="en-US" sz="2800" b="0" i="1" smtClean="0">
                               <a:solidFill>
-                                <a:schemeClr val="accent5"/>
+                                <a:schemeClr val="accent5">
+                                  <a:lumMod val="60000"/>
+                                  <a:lumOff val="40000"/>
+                                </a:schemeClr>
                               </a:solidFill>
                               <a:latin typeface="Cambria Math" panose="02040503050406030204" pitchFamily="18" charset="0"/>
                             </a:rPr>
@@ -18695,7 +18788,10 @@
                           <m:r>
                             <a:rPr lang="en-US" sz="2800" b="0" i="1" smtClean="0">
                               <a:solidFill>
-                                <a:schemeClr val="accent5"/>
+                                <a:schemeClr val="accent5">
+                                  <a:lumMod val="60000"/>
+                                  <a:lumOff val="40000"/>
+                                </a:schemeClr>
                               </a:solidFill>
                               <a:latin typeface="Cambria Math" panose="02040503050406030204" pitchFamily="18" charset="0"/>
                             </a:rPr>
@@ -18704,7 +18800,10 @@
                           <m:r>
                             <a:rPr lang="en-US" sz="2800" b="0" i="1" smtClean="0">
                               <a:solidFill>
-                                <a:schemeClr val="accent5"/>
+                                <a:schemeClr val="accent5">
+                                  <a:lumMod val="60000"/>
+                                  <a:lumOff val="40000"/>
+                                </a:schemeClr>
                               </a:solidFill>
                               <a:latin typeface="Cambria Math" panose="02040503050406030204" pitchFamily="18" charset="0"/>
                             </a:rPr>
@@ -18726,7 +18825,10 @@
                       <m:r>
                         <a:rPr lang="en-US" sz="2800" b="0" i="1" smtClean="0">
                           <a:solidFill>
-                            <a:schemeClr val="accent3"/>
+                            <a:schemeClr val="accent3">
+                              <a:lumMod val="60000"/>
+                              <a:lumOff val="40000"/>
+                            </a:schemeClr>
                           </a:solidFill>
                           <a:latin typeface="Cambria Math" panose="02040503050406030204" pitchFamily="18" charset="0"/>
                         </a:rPr>
@@ -18747,7 +18849,10 @@
                         <a:rPr lang="en-US" sz="2800" i="1" smtClean="0">
                           <a:ln w="0"/>
                           <a:solidFill>
-                            <a:schemeClr val="accent1"/>
+                            <a:schemeClr val="accent1">
+                              <a:lumMod val="60000"/>
+                              <a:lumOff val="40000"/>
+                            </a:schemeClr>
                           </a:solidFill>
                           <a:effectLst>
                             <a:outerShdw blurRad="38100" dist="25400" dir="5400000" algn="ctr" rotWithShape="0">
@@ -18764,7 +18869,10 @@
                         <a:rPr lang="en-US" sz="2800" i="1" smtClean="0">
                           <a:ln w="0"/>
                           <a:solidFill>
-                            <a:schemeClr val="accent1"/>
+                            <a:schemeClr val="accent1">
+                              <a:lumMod val="60000"/>
+                              <a:lumOff val="40000"/>
+                            </a:schemeClr>
                           </a:solidFill>
                           <a:effectLst>
                             <a:outerShdw blurRad="38100" dist="25400" dir="5400000" algn="ctr" rotWithShape="0">
@@ -18781,7 +18889,10 @@
                         <a:rPr lang="en-US" sz="2800" i="1" smtClean="0">
                           <a:ln w="0"/>
                           <a:solidFill>
-                            <a:schemeClr val="accent1"/>
+                            <a:schemeClr val="accent1">
+                              <a:lumMod val="60000"/>
+                              <a:lumOff val="40000"/>
+                            </a:schemeClr>
                           </a:solidFill>
                           <a:effectLst>
                             <a:outerShdw blurRad="38100" dist="25400" dir="5400000" algn="ctr" rotWithShape="0">
@@ -18808,7 +18919,10 @@
                       <m:r>
                         <a:rPr lang="en-US" sz="2800" b="0" i="1" smtClean="0">
                           <a:solidFill>
-                            <a:schemeClr val="accent3"/>
+                            <a:schemeClr val="accent3">
+                              <a:lumMod val="60000"/>
+                              <a:lumOff val="40000"/>
+                            </a:schemeClr>
                           </a:solidFill>
                           <a:latin typeface="Cambria Math" panose="02040503050406030204" pitchFamily="18" charset="0"/>
                         </a:rPr>
@@ -18828,7 +18942,7 @@
             </p:txBody>
           </p:sp>
         </mc:Choice>
-        <mc:Fallback xmlns="">
+        <mc:Fallback>
           <p:sp>
             <p:nvSpPr>
               <p:cNvPr id="12" name="TextBox 11">
@@ -18880,8 +18994,8 @@
           </p:sp>
         </mc:Fallback>
       </mc:AlternateContent>
-      <mc:AlternateContent xmlns:mc="http://schemas.openxmlformats.org/markup-compatibility/2006" xmlns:a14="http://schemas.microsoft.com/office/drawing/2010/main">
-        <mc:Choice Requires="a14">
+      <mc:AlternateContent xmlns:mc="http://schemas.openxmlformats.org/markup-compatibility/2006">
+        <mc:Choice xmlns:a14="http://schemas.microsoft.com/office/drawing/2010/main" Requires="a14">
           <p:sp>
             <p:nvSpPr>
               <p:cNvPr id="13" name="TextBox 12">
@@ -18928,7 +19042,10 @@
                         <a:rPr lang="en-US" sz="2800" i="1" smtClean="0">
                           <a:ln w="0"/>
                           <a:solidFill>
-                            <a:schemeClr val="accent1"/>
+                            <a:schemeClr val="accent1">
+                              <a:lumMod val="60000"/>
+                              <a:lumOff val="40000"/>
+                            </a:schemeClr>
                           </a:solidFill>
                           <a:effectLst>
                             <a:outerShdw blurRad="38100" dist="25400" dir="5400000" algn="ctr" rotWithShape="0">
@@ -18945,7 +19062,10 @@
                         <a:rPr lang="en-US" sz="2800" i="1" smtClean="0">
                           <a:ln w="0"/>
                           <a:solidFill>
-                            <a:schemeClr val="accent1"/>
+                            <a:schemeClr val="accent1">
+                              <a:lumMod val="60000"/>
+                              <a:lumOff val="40000"/>
+                            </a:schemeClr>
                           </a:solidFill>
                           <a:effectLst>
                             <a:outerShdw blurRad="38100" dist="25400" dir="5400000" algn="ctr" rotWithShape="0">
@@ -18962,7 +19082,10 @@
                         <a:rPr lang="en-US" sz="2800" i="1" smtClean="0">
                           <a:ln w="0"/>
                           <a:solidFill>
-                            <a:schemeClr val="accent1"/>
+                            <a:schemeClr val="accent1">
+                              <a:lumMod val="60000"/>
+                              <a:lumOff val="40000"/>
+                            </a:schemeClr>
                           </a:solidFill>
                           <a:effectLst>
                             <a:outerShdw blurRad="38100" dist="25400" dir="5400000" algn="ctr" rotWithShape="0">
@@ -18991,7 +19114,10 @@
                           <m:ctrlPr>
                             <a:rPr lang="en-US" sz="2800" b="0" i="1" smtClean="0">
                               <a:solidFill>
-                                <a:schemeClr val="accent5"/>
+                                <a:schemeClr val="accent5">
+                                  <a:lumMod val="60000"/>
+                                  <a:lumOff val="40000"/>
+                                </a:schemeClr>
                               </a:solidFill>
                               <a:latin typeface="Cambria Math" panose="02040503050406030204" pitchFamily="18" charset="0"/>
                             </a:rPr>
@@ -19001,7 +19127,10 @@
                           <m:r>
                             <a:rPr lang="en-US" sz="2800" b="0" i="1" smtClean="0">
                               <a:solidFill>
-                                <a:schemeClr val="accent5"/>
+                                <a:schemeClr val="accent5">
+                                  <a:lumMod val="60000"/>
+                                  <a:lumOff val="40000"/>
+                                </a:schemeClr>
                               </a:solidFill>
                               <a:latin typeface="Cambria Math" panose="02040503050406030204" pitchFamily="18" charset="0"/>
                             </a:rPr>
@@ -19010,7 +19139,10 @@
                           <m:r>
                             <a:rPr lang="en-US" sz="2800" b="0" i="1" smtClean="0">
                               <a:solidFill>
-                                <a:schemeClr val="accent5"/>
+                                <a:schemeClr val="accent5">
+                                  <a:lumMod val="60000"/>
+                                  <a:lumOff val="40000"/>
+                                </a:schemeClr>
                               </a:solidFill>
                               <a:latin typeface="Cambria Math" panose="02040503050406030204" pitchFamily="18" charset="0"/>
                             </a:rPr>
@@ -19019,7 +19151,10 @@
                           <m:r>
                             <a:rPr lang="en-US" sz="2800" b="0" i="1" smtClean="0">
                               <a:solidFill>
-                                <a:schemeClr val="accent5"/>
+                                <a:schemeClr val="accent5">
+                                  <a:lumMod val="60000"/>
+                                  <a:lumOff val="40000"/>
+                                </a:schemeClr>
                               </a:solidFill>
                               <a:latin typeface="Cambria Math" panose="02040503050406030204" pitchFamily="18" charset="0"/>
                             </a:rPr>
@@ -19030,7 +19165,10 @@
                       <m:r>
                         <a:rPr lang="en-US" sz="2800" b="0" i="1" smtClean="0">
                           <a:solidFill>
-                            <a:schemeClr val="accent5"/>
+                            <a:schemeClr val="accent5">
+                              <a:lumMod val="60000"/>
+                              <a:lumOff val="40000"/>
+                            </a:schemeClr>
                           </a:solidFill>
                           <a:latin typeface="Cambria Math" panose="02040503050406030204" pitchFamily="18" charset="0"/>
                         </a:rPr>
@@ -19041,7 +19179,10 @@
                           <m:ctrlPr>
                             <a:rPr lang="en-US" sz="2800" b="0" i="1" smtClean="0">
                               <a:solidFill>
-                                <a:schemeClr val="accent5"/>
+                                <a:schemeClr val="accent5">
+                                  <a:lumMod val="60000"/>
+                                  <a:lumOff val="40000"/>
+                                </a:schemeClr>
                               </a:solidFill>
                               <a:latin typeface="Cambria Math" panose="02040503050406030204" pitchFamily="18" charset="0"/>
                             </a:rPr>
@@ -19051,7 +19192,10 @@
                           <m:r>
                             <a:rPr lang="en-US" sz="2800" b="0" i="1" smtClean="0">
                               <a:solidFill>
-                                <a:schemeClr val="accent5"/>
+                                <a:schemeClr val="accent5">
+                                  <a:lumMod val="60000"/>
+                                  <a:lumOff val="40000"/>
+                                </a:schemeClr>
                               </a:solidFill>
                               <a:latin typeface="Cambria Math" panose="02040503050406030204" pitchFamily="18" charset="0"/>
                             </a:rPr>
@@ -19060,7 +19204,10 @@
                           <m:r>
                             <a:rPr lang="en-US" sz="2800" b="0" i="1" smtClean="0">
                               <a:solidFill>
-                                <a:schemeClr val="accent5"/>
+                                <a:schemeClr val="accent5">
+                                  <a:lumMod val="60000"/>
+                                  <a:lumOff val="40000"/>
+                                </a:schemeClr>
                               </a:solidFill>
                               <a:latin typeface="Cambria Math" panose="02040503050406030204" pitchFamily="18" charset="0"/>
                             </a:rPr>
@@ -19069,7 +19216,10 @@
                           <m:r>
                             <a:rPr lang="en-US" sz="2800" b="0" i="1" smtClean="0">
                               <a:solidFill>
-                                <a:schemeClr val="accent5"/>
+                                <a:schemeClr val="accent5">
+                                  <a:lumMod val="60000"/>
+                                  <a:lumOff val="40000"/>
+                                </a:schemeClr>
                               </a:solidFill>
                               <a:latin typeface="Cambria Math" panose="02040503050406030204" pitchFamily="18" charset="0"/>
                             </a:rPr>
@@ -19091,7 +19241,10 @@
                       <m:r>
                         <a:rPr lang="en-US" sz="2800" b="0" i="1" smtClean="0">
                           <a:solidFill>
-                            <a:schemeClr val="accent3"/>
+                            <a:schemeClr val="accent3">
+                              <a:lumMod val="60000"/>
+                              <a:lumOff val="40000"/>
+                            </a:schemeClr>
                           </a:solidFill>
                           <a:latin typeface="Cambria Math" panose="02040503050406030204" pitchFamily="18" charset="0"/>
                         </a:rPr>
@@ -19111,7 +19264,10 @@
                       <m:r>
                         <a:rPr lang="en-US" sz="2800" b="0" i="1" smtClean="0">
                           <a:solidFill>
-                            <a:schemeClr val="accent3"/>
+                            <a:schemeClr val="accent3">
+                              <a:lumMod val="60000"/>
+                              <a:lumOff val="40000"/>
+                            </a:schemeClr>
                           </a:solidFill>
                           <a:latin typeface="Cambria Math" panose="02040503050406030204" pitchFamily="18" charset="0"/>
                         </a:rPr>
@@ -19131,7 +19287,7 @@
             </p:txBody>
           </p:sp>
         </mc:Choice>
-        <mc:Fallback xmlns="">
+        <mc:Fallback>
           <p:sp>
             <p:nvSpPr>
               <p:cNvPr id="13" name="TextBox 12">
@@ -19558,8 +19714,8 @@
           </p:sp>
         </mc:Fallback>
       </mc:AlternateContent>
-      <mc:AlternateContent xmlns:mc="http://schemas.openxmlformats.org/markup-compatibility/2006" xmlns:a14="http://schemas.microsoft.com/office/drawing/2010/main">
-        <mc:Choice Requires="a14">
+      <mc:AlternateContent xmlns:mc="http://schemas.openxmlformats.org/markup-compatibility/2006">
+        <mc:Choice xmlns:a14="http://schemas.microsoft.com/office/drawing/2010/main" Requires="a14">
           <p:sp>
             <p:nvSpPr>
               <p:cNvPr id="2" name="TextBox 1">
@@ -19713,7 +19869,7 @@
                           <m:ctrlPr>
                             <a:rPr lang="en-US" sz="2800" i="1" smtClean="0">
                               <a:solidFill>
-                                <a:schemeClr val="bg1"/>
+                                <a:schemeClr val="accent1"/>
                               </a:solidFill>
                               <a:latin typeface="Cambria Math" panose="02040503050406030204" pitchFamily="18" charset="0"/>
                             </a:rPr>
@@ -19723,7 +19879,7 @@
                           <m:r>
                             <a:rPr lang="en-US" sz="2800" b="0" i="0" smtClean="0">
                               <a:solidFill>
-                                <a:schemeClr val="bg1"/>
+                                <a:schemeClr val="accent1"/>
                               </a:solidFill>
                               <a:latin typeface="Cambria Math" panose="02040503050406030204" pitchFamily="18" charset="0"/>
                             </a:rPr>
@@ -19736,7 +19892,7 @@
                               <m:ctrlPr>
                                 <a:rPr lang="en-US" sz="2800" i="1" smtClean="0">
                                   <a:solidFill>
-                                    <a:schemeClr val="bg1"/>
+                                    <a:schemeClr val="accent1"/>
                                   </a:solidFill>
                                   <a:latin typeface="Cambria Math" panose="02040503050406030204" pitchFamily="18" charset="0"/>
                                 </a:rPr>
@@ -19749,7 +19905,7 @@
                                 </m:rPr>
                                 <a:rPr lang="en-US" sz="2800" b="0" i="0" smtClean="0">
                                   <a:solidFill>
-                                    <a:schemeClr val="bg1"/>
+                                    <a:schemeClr val="accent1"/>
                                   </a:solidFill>
                                   <a:latin typeface="Cambria Math" panose="02040503050406030204" pitchFamily="18" charset="0"/>
                                 </a:rPr>
@@ -19760,7 +19916,7 @@
                               <m:r>
                                 <a:rPr lang="en-US" sz="2800" b="0" i="0" smtClean="0">
                                   <a:solidFill>
-                                    <a:schemeClr val="bg1"/>
+                                    <a:schemeClr val="accent1"/>
                                   </a:solidFill>
                                   <a:latin typeface="Cambria Math" panose="02040503050406030204" pitchFamily="18" charset="0"/>
                                 </a:rPr>
@@ -20011,7 +20167,7 @@
             </p:txBody>
           </p:sp>
         </mc:Choice>
-        <mc:Fallback xmlns="">
+        <mc:Fallback>
           <p:sp>
             <p:nvSpPr>
               <p:cNvPr id="2" name="TextBox 1">
@@ -21610,7 +21766,10 @@
             <a:r>
               <a:rPr lang="en-US" sz="2400" b="0" i="0" u="none" strike="noStrike" cap="none" dirty="0">
                 <a:solidFill>
-                  <a:schemeClr val="accent1"/>
+                  <a:schemeClr val="accent1">
+                    <a:lumMod val="60000"/>
+                    <a:lumOff val="40000"/>
+                  </a:schemeClr>
                 </a:solidFill>
                 <a:latin typeface="Calibri"/>
                 <a:ea typeface="Calibri"/>
@@ -21621,7 +21780,10 @@
             </a:r>
             <a:endParaRPr sz="1400" b="0" i="0" u="none" strike="noStrike" cap="none" dirty="0">
               <a:solidFill>
-                <a:schemeClr val="accent1"/>
+                <a:schemeClr val="accent1">
+                  <a:lumMod val="60000"/>
+                  <a:lumOff val="40000"/>
+                </a:schemeClr>
               </a:solidFill>
               <a:latin typeface="Arial"/>
               <a:ea typeface="Arial"/>
@@ -21680,7 +21842,10 @@
             <a:r>
               <a:rPr lang="en-US" sz="2400" b="0" i="0" u="none" strike="noStrike" cap="none" dirty="0">
                 <a:solidFill>
-                  <a:schemeClr val="accent1"/>
+                  <a:schemeClr val="accent1">
+                    <a:lumMod val="60000"/>
+                    <a:lumOff val="40000"/>
+                  </a:schemeClr>
                 </a:solidFill>
                 <a:latin typeface="Calibri"/>
                 <a:ea typeface="Calibri"/>
@@ -21692,7 +21857,10 @@
             <a:r>
               <a:rPr lang="en-US" sz="2400" b="0" i="0" u="sng" strike="noStrike" cap="none" dirty="0">
                 <a:solidFill>
-                  <a:schemeClr val="accent1"/>
+                  <a:schemeClr val="accent1">
+                    <a:lumMod val="60000"/>
+                    <a:lumOff val="40000"/>
+                  </a:schemeClr>
                 </a:solidFill>
                 <a:latin typeface="Calibri"/>
                 <a:ea typeface="Calibri"/>
@@ -21704,7 +21872,10 @@
             <a:r>
               <a:rPr lang="en-US" sz="2400" b="0" i="0" u="none" strike="noStrike" cap="none" dirty="0">
                 <a:solidFill>
-                  <a:schemeClr val="accent1"/>
+                  <a:schemeClr val="accent1">
+                    <a:lumMod val="60000"/>
+                    <a:lumOff val="40000"/>
+                  </a:schemeClr>
                 </a:solidFill>
                 <a:latin typeface="Calibri"/>
                 <a:ea typeface="Calibri"/>
@@ -21715,7 +21886,10 @@
             </a:r>
             <a:endParaRPr sz="1400" b="0" i="0" u="none" strike="noStrike" cap="none" dirty="0">
               <a:solidFill>
-                <a:schemeClr val="accent1"/>
+                <a:schemeClr val="accent1">
+                  <a:lumMod val="60000"/>
+                  <a:lumOff val="40000"/>
+                </a:schemeClr>
               </a:solidFill>
               <a:latin typeface="Arial"/>
               <a:ea typeface="Arial"/>
@@ -21744,7 +21918,10 @@
             <a:r>
               <a:rPr lang="en-US" sz="2400" b="0" i="0" u="none" strike="noStrike" cap="none" dirty="0">
                 <a:solidFill>
-                  <a:schemeClr val="accent1"/>
+                  <a:schemeClr val="accent1">
+                    <a:lumMod val="60000"/>
+                    <a:lumOff val="40000"/>
+                  </a:schemeClr>
                 </a:solidFill>
                 <a:latin typeface="Calibri"/>
                 <a:ea typeface="Calibri"/>
@@ -21755,7 +21932,10 @@
             </a:r>
             <a:endParaRPr sz="1400" b="0" i="0" u="none" strike="noStrike" cap="none" dirty="0">
               <a:solidFill>
-                <a:schemeClr val="accent1"/>
+                <a:schemeClr val="accent1">
+                  <a:lumMod val="60000"/>
+                  <a:lumOff val="40000"/>
+                </a:schemeClr>
               </a:solidFill>
               <a:latin typeface="Arial"/>
               <a:ea typeface="Arial"/>
@@ -22722,7 +22902,10 @@
             <a:r>
               <a:rPr lang="en-US" sz="2400" b="0" i="0" u="none" strike="noStrike" cap="none" dirty="0">
                 <a:solidFill>
-                  <a:schemeClr val="accent1"/>
+                  <a:schemeClr val="accent1">
+                    <a:lumMod val="60000"/>
+                    <a:lumOff val="40000"/>
+                  </a:schemeClr>
                 </a:solidFill>
                 <a:latin typeface="Calibri"/>
                 <a:ea typeface="Calibri"/>
@@ -22733,7 +22916,10 @@
             </a:r>
             <a:endParaRPr sz="1400" b="0" i="0" u="none" strike="noStrike" cap="none" dirty="0">
               <a:solidFill>
-                <a:schemeClr val="accent1"/>
+                <a:schemeClr val="accent1">
+                  <a:lumMod val="60000"/>
+                  <a:lumOff val="40000"/>
+                </a:schemeClr>
               </a:solidFill>
               <a:latin typeface="Arial"/>
               <a:ea typeface="Arial"/>
@@ -25169,7 +25355,10 @@
             <a:r>
               <a:rPr lang="en-US" sz="2400" dirty="0">
                 <a:solidFill>
-                  <a:schemeClr val="accent1"/>
+                  <a:schemeClr val="accent1">
+                    <a:lumMod val="60000"/>
+                    <a:lumOff val="40000"/>
+                  </a:schemeClr>
                 </a:solidFill>
                 <a:latin typeface="Calibri"/>
                 <a:ea typeface="Arial"/>
@@ -25180,7 +25369,10 @@
             </a:r>
             <a:endParaRPr sz="1400" b="0" i="0" u="none" strike="noStrike" cap="none" dirty="0">
               <a:solidFill>
-                <a:schemeClr val="accent1"/>
+                <a:schemeClr val="accent1">
+                  <a:lumMod val="60000"/>
+                  <a:lumOff val="40000"/>
+                </a:schemeClr>
               </a:solidFill>
               <a:latin typeface="Arial"/>
               <a:ea typeface="Arial"/>
@@ -25245,7 +25437,10 @@
             <a:r>
               <a:rPr lang="en-US" sz="2400" dirty="0">
                 <a:solidFill>
-                  <a:schemeClr val="accent1"/>
+                  <a:schemeClr val="accent1">
+                    <a:lumMod val="60000"/>
+                    <a:lumOff val="40000"/>
+                  </a:schemeClr>
                 </a:solidFill>
                 <a:latin typeface="Calibri"/>
                 <a:ea typeface="Arial"/>
@@ -25256,7 +25451,10 @@
             </a:r>
             <a:endParaRPr sz="1400" b="0" i="0" u="none" strike="noStrike" cap="none" dirty="0">
               <a:solidFill>
-                <a:schemeClr val="accent1"/>
+                <a:schemeClr val="accent1">
+                  <a:lumMod val="60000"/>
+                  <a:lumOff val="40000"/>
+                </a:schemeClr>
               </a:solidFill>
               <a:latin typeface="Arial"/>
               <a:ea typeface="Arial"/>
@@ -25321,7 +25519,10 @@
             <a:r>
               <a:rPr lang="en-US" sz="2400" dirty="0">
                 <a:solidFill>
-                  <a:schemeClr val="accent1"/>
+                  <a:schemeClr val="accent1">
+                    <a:lumMod val="60000"/>
+                    <a:lumOff val="40000"/>
+                  </a:schemeClr>
                 </a:solidFill>
                 <a:latin typeface="Calibri"/>
                 <a:ea typeface="Arial"/>
@@ -25332,7 +25533,10 @@
             </a:r>
             <a:endParaRPr sz="1400" b="0" i="0" u="none" strike="noStrike" cap="none" dirty="0">
               <a:solidFill>
-                <a:schemeClr val="accent1"/>
+                <a:schemeClr val="accent1">
+                  <a:lumMod val="60000"/>
+                  <a:lumOff val="40000"/>
+                </a:schemeClr>
               </a:solidFill>
               <a:latin typeface="Arial"/>
               <a:ea typeface="Arial"/>
@@ -25397,7 +25601,10 @@
             <a:r>
               <a:rPr lang="en-US" sz="2400" dirty="0">
                 <a:solidFill>
-                  <a:schemeClr val="accent1"/>
+                  <a:schemeClr val="accent1">
+                    <a:lumMod val="60000"/>
+                    <a:lumOff val="40000"/>
+                  </a:schemeClr>
                 </a:solidFill>
                 <a:latin typeface="Calibri"/>
                 <a:ea typeface="Arial"/>
@@ -25408,7 +25615,10 @@
             </a:r>
             <a:endParaRPr sz="1400" b="0" i="0" u="none" strike="noStrike" cap="none" dirty="0">
               <a:solidFill>
-                <a:schemeClr val="accent1"/>
+                <a:schemeClr val="accent1">
+                  <a:lumMod val="60000"/>
+                  <a:lumOff val="40000"/>
+                </a:schemeClr>
               </a:solidFill>
               <a:latin typeface="Arial"/>
               <a:ea typeface="Arial"/>
@@ -25438,6 +25648,14 @@
           <a:prstGeom prst="rightBrace">
             <a:avLst/>
           </a:prstGeom>
+          <a:ln>
+            <a:solidFill>
+              <a:schemeClr val="accent1">
+                <a:lumMod val="60000"/>
+                <a:lumOff val="40000"/>
+              </a:schemeClr>
+            </a:solidFill>
+          </a:ln>
         </p:spPr>
         <p:style>
           <a:lnRef idx="1">
@@ -25517,7 +25735,10 @@
             <a:r>
               <a:rPr lang="en-US" sz="2400" dirty="0">
                 <a:solidFill>
-                  <a:schemeClr val="accent1"/>
+                  <a:schemeClr val="accent1">
+                    <a:lumMod val="60000"/>
+                    <a:lumOff val="40000"/>
+                  </a:schemeClr>
                 </a:solidFill>
                 <a:latin typeface="Calibri"/>
                 <a:ea typeface="Arial"/>
@@ -25528,7 +25749,10 @@
             </a:r>
             <a:endParaRPr sz="1400" b="0" i="0" u="none" strike="noStrike" cap="none" dirty="0">
               <a:solidFill>
-                <a:schemeClr val="accent1"/>
+                <a:schemeClr val="accent1">
+                  <a:lumMod val="60000"/>
+                  <a:lumOff val="40000"/>
+                </a:schemeClr>
               </a:solidFill>
               <a:latin typeface="Arial"/>
               <a:ea typeface="Arial"/>
@@ -25538,8 +25762,8 @@
           </a:p>
         </p:txBody>
       </p:sp>
-      <mc:AlternateContent xmlns:mc="http://schemas.openxmlformats.org/markup-compatibility/2006" xmlns:a14="http://schemas.microsoft.com/office/drawing/2010/main">
-        <mc:Choice Requires="a14">
+      <mc:AlternateContent xmlns:mc="http://schemas.openxmlformats.org/markup-compatibility/2006">
+        <mc:Choice xmlns:a14="http://schemas.microsoft.com/office/drawing/2010/main" Requires="a14">
           <p:sp>
             <p:nvSpPr>
               <p:cNvPr id="24" name="Google Shape;1391;p28">
@@ -25595,7 +25819,10 @@
                 <a:r>
                   <a:rPr lang="en-US" sz="2400" dirty="0">
                     <a:solidFill>
-                      <a:schemeClr val="accent1"/>
+                      <a:schemeClr val="accent1">
+                        <a:lumMod val="60000"/>
+                        <a:lumOff val="40000"/>
+                      </a:schemeClr>
                     </a:solidFill>
                     <a:latin typeface="Calibri"/>
                     <a:ea typeface="Arial"/>
@@ -25610,9 +25837,12 @@
                       <m:rPr>
                         <m:sty m:val="p"/>
                       </m:rPr>
-                      <a:rPr lang="en-US" sz="2400" b="0" i="0" smtClean="0">
+                      <a:rPr lang="el-GR" sz="2400" b="0" i="0" smtClean="0">
                         <a:solidFill>
-                          <a:schemeClr val="accent1"/>
+                          <a:schemeClr val="accent1">
+                            <a:lumMod val="60000"/>
+                            <a:lumOff val="40000"/>
+                          </a:schemeClr>
                         </a:solidFill>
                         <a:latin typeface="Cambria Math" panose="02040503050406030204" pitchFamily="18" charset="0"/>
                         <a:ea typeface="Arial"/>
@@ -25622,9 +25852,12 @@
                       <m:t>Θ</m:t>
                     </m:r>
                     <m:r>
-                      <a:rPr lang="en-US" sz="2400" b="0" i="1" smtClean="0">
+                      <a:rPr lang="el-GR" sz="2400" b="0" i="1" smtClean="0">
                         <a:solidFill>
-                          <a:schemeClr val="accent1"/>
+                          <a:schemeClr val="accent1">
+                            <a:lumMod val="60000"/>
+                            <a:lumOff val="40000"/>
+                          </a:schemeClr>
                         </a:solidFill>
                         <a:latin typeface="Cambria Math" panose="02040503050406030204" pitchFamily="18" charset="0"/>
                         <a:ea typeface="Arial"/>
@@ -25636,9 +25869,12 @@
                     <m:sSup>
                       <m:sSupPr>
                         <m:ctrlPr>
-                          <a:rPr lang="en-US" sz="2400" b="0" i="1" smtClean="0">
+                          <a:rPr lang="ar-AE" sz="2400" b="0" i="1" smtClean="0">
                             <a:solidFill>
-                              <a:schemeClr val="accent1"/>
+                              <a:schemeClr val="accent1">
+                                <a:lumMod val="60000"/>
+                                <a:lumOff val="40000"/>
+                              </a:schemeClr>
                             </a:solidFill>
                             <a:latin typeface="Cambria Math" panose="02040503050406030204" pitchFamily="18" charset="0"/>
                             <a:ea typeface="Arial"/>
@@ -25649,9 +25885,12 @@
                       </m:sSupPr>
                       <m:e>
                         <m:r>
-                          <a:rPr lang="en-US" sz="2400" b="0" i="1" smtClean="0">
+                          <a:rPr lang="ar-AE" sz="2400" b="0" i="1" smtClean="0">
                             <a:solidFill>
-                              <a:schemeClr val="accent1"/>
+                              <a:schemeClr val="accent1">
+                                <a:lumMod val="60000"/>
+                                <a:lumOff val="40000"/>
+                              </a:schemeClr>
                             </a:solidFill>
                             <a:latin typeface="Cambria Math" panose="02040503050406030204" pitchFamily="18" charset="0"/>
                             <a:ea typeface="Arial"/>
@@ -25663,9 +25902,12 @@
                       </m:e>
                       <m:sup>
                         <m:r>
-                          <a:rPr lang="en-US" sz="2400" b="0" i="1" smtClean="0">
+                          <a:rPr lang="ar-AE" sz="2400" b="0" i="1" smtClean="0">
                             <a:solidFill>
-                              <a:schemeClr val="accent1"/>
+                              <a:schemeClr val="accent1">
+                                <a:lumMod val="60000"/>
+                                <a:lumOff val="40000"/>
+                              </a:schemeClr>
                             </a:solidFill>
                             <a:latin typeface="Cambria Math" panose="02040503050406030204" pitchFamily="18" charset="0"/>
                             <a:ea typeface="Arial"/>
@@ -25677,9 +25919,12 @@
                       </m:sup>
                     </m:sSup>
                     <m:r>
-                      <a:rPr lang="en-US" sz="2400" b="0" i="1" smtClean="0">
+                      <a:rPr lang="ar-AE" sz="2400" b="0" i="1" smtClean="0">
                         <a:solidFill>
-                          <a:schemeClr val="accent1"/>
+                          <a:schemeClr val="accent1">
+                            <a:lumMod val="60000"/>
+                            <a:lumOff val="40000"/>
+                          </a:schemeClr>
                         </a:solidFill>
                         <a:latin typeface="Cambria Math" panose="02040503050406030204" pitchFamily="18" charset="0"/>
                         <a:ea typeface="Arial"/>
@@ -25690,9 +25935,12 @@
                     </m:r>
                   </m:oMath>
                 </a14:m>
-                <a:endParaRPr sz="1400" b="0" i="0" u="none" strike="noStrike" cap="none" dirty="0">
+                <a:endParaRPr lang="ar-AE" sz="1400" b="0" i="0" u="none" strike="noStrike" cap="none" dirty="0">
                   <a:solidFill>
-                    <a:schemeClr val="accent1"/>
+                    <a:schemeClr val="accent1">
+                      <a:lumMod val="60000"/>
+                      <a:lumOff val="40000"/>
+                    </a:schemeClr>
                   </a:solidFill>
                   <a:latin typeface="Arial"/>
                   <a:ea typeface="Arial"/>
@@ -25703,7 +25951,7 @@
             </p:txBody>
           </p:sp>
         </mc:Choice>
-        <mc:Fallback xmlns="">
+        <mc:Fallback>
           <p:sp>
             <p:nvSpPr>
               <p:cNvPr id="24" name="Google Shape;1391;p28">
@@ -25729,7 +25977,7 @@
               <a:blipFill>
                 <a:blip r:embed="rId3"/>
                 <a:stretch>
-                  <a:fillRect t="-5263" b="-28947"/>
+                  <a:fillRect t="-7895" b="-28947"/>
                 </a:stretch>
               </a:blipFill>
               <a:ln>
@@ -26981,7 +27229,10 @@
             <a:r>
               <a:rPr lang="en-US" sz="2400" b="0" i="0" u="none" strike="noStrike" cap="none" dirty="0">
                 <a:solidFill>
-                  <a:schemeClr val="accent1"/>
+                  <a:schemeClr val="accent1">
+                    <a:lumMod val="60000"/>
+                    <a:lumOff val="40000"/>
+                  </a:schemeClr>
                 </a:solidFill>
                 <a:latin typeface="Calibri"/>
                 <a:ea typeface="Calibri"/>
@@ -27012,7 +27263,10 @@
             <a:r>
               <a:rPr lang="en-US" sz="2400" b="0" i="0" u="none" strike="noStrike" cap="none" dirty="0">
                 <a:solidFill>
-                  <a:schemeClr val="accent1"/>
+                  <a:schemeClr val="accent1">
+                    <a:lumMod val="60000"/>
+                    <a:lumOff val="40000"/>
+                  </a:schemeClr>
                 </a:solidFill>
                 <a:latin typeface="Calibri"/>
                 <a:ea typeface="Arial"/>
@@ -27023,7 +27277,10 @@
             </a:r>
             <a:endParaRPr sz="1400" b="0" i="0" u="none" strike="noStrike" cap="none" dirty="0">
               <a:solidFill>
-                <a:schemeClr val="accent1"/>
+                <a:schemeClr val="accent1">
+                  <a:lumMod val="60000"/>
+                  <a:lumOff val="40000"/>
+                </a:schemeClr>
               </a:solidFill>
               <a:latin typeface="Arial"/>
               <a:ea typeface="Arial"/>
@@ -27786,8 +28043,8 @@
           </a:p>
         </p:txBody>
       </p:sp>
-      <mc:AlternateContent xmlns:mc="http://schemas.openxmlformats.org/markup-compatibility/2006" xmlns:a14="http://schemas.microsoft.com/office/drawing/2010/main">
-        <mc:Choice Requires="a14">
+      <mc:AlternateContent xmlns:mc="http://schemas.openxmlformats.org/markup-compatibility/2006">
+        <mc:Choice xmlns:a14="http://schemas.microsoft.com/office/drawing/2010/main" Requires="a14">
           <p:sp>
             <p:nvSpPr>
               <p:cNvPr id="10" name="Google Shape;1391;p28">
@@ -27966,7 +28223,10 @@
                       <m:r>
                         <a:rPr lang="ar-AE" sz="2400" b="0" i="1" u="none" strike="noStrike" cap="none" smtClean="0">
                           <a:solidFill>
-                            <a:schemeClr val="accent1"/>
+                            <a:schemeClr val="accent1">
+                              <a:lumMod val="60000"/>
+                              <a:lumOff val="40000"/>
+                            </a:schemeClr>
                           </a:solidFill>
                           <a:latin typeface="Cambria Math" panose="02040503050406030204" pitchFamily="18" charset="0"/>
                           <a:ea typeface="Calibri"/>
@@ -27992,7 +28252,10 @@
                       <m:r>
                         <a:rPr lang="ar-AE" sz="2400" b="0" i="1" u="none" strike="noStrike" cap="none" smtClean="0">
                           <a:solidFill>
-                            <a:schemeClr val="accent1"/>
+                            <a:schemeClr val="accent1">
+                              <a:lumMod val="60000"/>
+                              <a:lumOff val="40000"/>
+                            </a:schemeClr>
                           </a:solidFill>
                           <a:latin typeface="Cambria Math" panose="02040503050406030204" pitchFamily="18" charset="0"/>
                           <a:ea typeface="Calibri"/>
@@ -28102,7 +28365,10 @@
                       <m:r>
                         <a:rPr lang="ar-AE" sz="2400" b="0" i="1" u="none" strike="noStrike" cap="none" smtClean="0">
                           <a:solidFill>
-                            <a:schemeClr val="accent1"/>
+                            <a:schemeClr val="accent1">
+                              <a:lumMod val="60000"/>
+                              <a:lumOff val="40000"/>
+                            </a:schemeClr>
                           </a:solidFill>
                           <a:latin typeface="Cambria Math" panose="02040503050406030204" pitchFamily="18" charset="0"/>
                           <a:ea typeface="Calibri"/>
@@ -28128,7 +28394,10 @@
                       <m:r>
                         <a:rPr lang="ar-AE" sz="2400" b="0" i="1" u="none" strike="noStrike" cap="none" smtClean="0">
                           <a:solidFill>
-                            <a:schemeClr val="accent1"/>
+                            <a:schemeClr val="accent1">
+                              <a:lumMod val="60000"/>
+                              <a:lumOff val="40000"/>
+                            </a:schemeClr>
                           </a:solidFill>
                           <a:latin typeface="Cambria Math" panose="02040503050406030204" pitchFamily="18" charset="0"/>
                           <a:ea typeface="Calibri"/>
@@ -28169,7 +28438,7 @@
             </p:txBody>
           </p:sp>
         </mc:Choice>
-        <mc:Fallback xmlns="">
+        <mc:Fallback>
           <p:sp>
             <p:nvSpPr>
               <p:cNvPr id="10" name="Google Shape;1391;p28">
@@ -32638,8 +32907,8 @@
           </a:p>
         </p:txBody>
       </p:sp>
-      <mc:AlternateContent xmlns:mc="http://schemas.openxmlformats.org/markup-compatibility/2006" xmlns:a14="http://schemas.microsoft.com/office/drawing/2010/main">
-        <mc:Choice Requires="a14">
+      <mc:AlternateContent xmlns:mc="http://schemas.openxmlformats.org/markup-compatibility/2006">
+        <mc:Choice xmlns:a14="http://schemas.microsoft.com/office/drawing/2010/main" Requires="a14">
           <p:sp>
             <p:nvSpPr>
               <p:cNvPr id="2" name="TextBox 1">
@@ -32687,7 +32956,10 @@
                           <m:ctrlPr>
                             <a:rPr lang="en-US" sz="2800" b="0" i="1" smtClean="0">
                               <a:solidFill>
-                                <a:schemeClr val="accent5"/>
+                                <a:schemeClr val="accent5">
+                                  <a:lumMod val="60000"/>
+                                  <a:lumOff val="40000"/>
+                                </a:schemeClr>
                               </a:solidFill>
                               <a:latin typeface="Cambria Math" panose="02040503050406030204" pitchFamily="18" charset="0"/>
                             </a:rPr>
@@ -32697,7 +32969,10 @@
                           <m:r>
                             <a:rPr lang="en-US" sz="2800" b="0" i="1" smtClean="0">
                               <a:solidFill>
-                                <a:schemeClr val="accent5"/>
+                                <a:schemeClr val="accent5">
+                                  <a:lumMod val="60000"/>
+                                  <a:lumOff val="40000"/>
+                                </a:schemeClr>
                               </a:solidFill>
                               <a:latin typeface="Cambria Math" panose="02040503050406030204" pitchFamily="18" charset="0"/>
                             </a:rPr>
@@ -32708,7 +32983,10 @@
                           <m:r>
                             <a:rPr lang="en-US" sz="2800" b="0" i="1" smtClean="0">
                               <a:solidFill>
-                                <a:schemeClr val="accent5"/>
+                                <a:schemeClr val="accent5">
+                                  <a:lumMod val="60000"/>
+                                  <a:lumOff val="40000"/>
+                                </a:schemeClr>
                               </a:solidFill>
                               <a:latin typeface="Cambria Math" panose="02040503050406030204" pitchFamily="18" charset="0"/>
                             </a:rPr>
@@ -32728,7 +33006,10 @@
                           <m:r>
                             <a:rPr lang="en-US" sz="2800" b="0" i="1" smtClean="0">
                               <a:solidFill>
-                                <a:schemeClr val="accent1"/>
+                                <a:schemeClr val="accent1">
+                                  <a:lumMod val="60000"/>
+                                  <a:lumOff val="40000"/>
+                                </a:schemeClr>
                               </a:solidFill>
                               <a:latin typeface="Cambria Math" panose="02040503050406030204" pitchFamily="18" charset="0"/>
                             </a:rPr>
@@ -32739,7 +33020,10 @@
                       <m:r>
                         <a:rPr lang="en-US" sz="2800" b="0" i="1" smtClean="0">
                           <a:solidFill>
-                            <a:schemeClr val="accent5"/>
+                            <a:schemeClr val="accent5">
+                              <a:lumMod val="60000"/>
+                              <a:lumOff val="40000"/>
+                            </a:schemeClr>
                           </a:solidFill>
                           <a:latin typeface="Cambria Math" panose="02040503050406030204" pitchFamily="18" charset="0"/>
                         </a:rPr>
@@ -32750,7 +33034,10 @@
                           <m:ctrlPr>
                             <a:rPr lang="en-US" sz="2800" b="0" i="1" smtClean="0">
                               <a:solidFill>
-                                <a:schemeClr val="accent5"/>
+                                <a:schemeClr val="accent5">
+                                  <a:lumMod val="60000"/>
+                                  <a:lumOff val="40000"/>
+                                </a:schemeClr>
                               </a:solidFill>
                               <a:latin typeface="Cambria Math" panose="02040503050406030204" pitchFamily="18" charset="0"/>
                             </a:rPr>
@@ -32760,7 +33047,10 @@
                           <m:r>
                             <a:rPr lang="en-US" sz="2800" b="0" i="1" smtClean="0">
                               <a:solidFill>
-                                <a:schemeClr val="accent5"/>
+                                <a:schemeClr val="accent5">
+                                  <a:lumMod val="60000"/>
+                                  <a:lumOff val="40000"/>
+                                </a:schemeClr>
                               </a:solidFill>
                               <a:latin typeface="Cambria Math" panose="02040503050406030204" pitchFamily="18" charset="0"/>
                             </a:rPr>
@@ -32773,7 +33063,10 @@
                               <m:ctrlPr>
                                 <a:rPr lang="en-US" sz="2800" b="0" i="1" smtClean="0">
                                   <a:solidFill>
-                                    <a:schemeClr val="accent5"/>
+                                    <a:schemeClr val="accent5">
+                                      <a:lumMod val="60000"/>
+                                      <a:lumOff val="40000"/>
+                                    </a:schemeClr>
                                   </a:solidFill>
                                   <a:latin typeface="Cambria Math" panose="02040503050406030204" pitchFamily="18" charset="0"/>
                                 </a:rPr>
@@ -32783,7 +33076,10 @@
                               <m:r>
                                 <a:rPr lang="en-US" sz="2800" b="0" i="1" smtClean="0">
                                   <a:solidFill>
-                                    <a:schemeClr val="accent5"/>
+                                    <a:schemeClr val="accent5">
+                                      <a:lumMod val="60000"/>
+                                      <a:lumOff val="40000"/>
+                                    </a:schemeClr>
                                   </a:solidFill>
                                   <a:latin typeface="Cambria Math" panose="02040503050406030204" pitchFamily="18" charset="0"/>
                                 </a:rPr>
@@ -32794,7 +33090,10 @@
                               <m:r>
                                 <a:rPr lang="en-US" sz="2800" b="0" i="1" smtClean="0">
                                   <a:solidFill>
-                                    <a:schemeClr val="accent5"/>
+                                    <a:schemeClr val="accent5">
+                                      <a:lumMod val="60000"/>
+                                      <a:lumOff val="40000"/>
+                                    </a:schemeClr>
                                   </a:solidFill>
                                   <a:latin typeface="Cambria Math" panose="02040503050406030204" pitchFamily="18" charset="0"/>
                                 </a:rPr>
@@ -32816,7 +33115,10 @@
                           <m:r>
                             <a:rPr lang="en-US" sz="2800" b="0" i="1" smtClean="0">
                               <a:solidFill>
-                                <a:schemeClr val="accent1"/>
+                                <a:schemeClr val="accent1">
+                                  <a:lumMod val="60000"/>
+                                  <a:lumOff val="40000"/>
+                                </a:schemeClr>
                               </a:solidFill>
                               <a:latin typeface="Cambria Math" panose="02040503050406030204" pitchFamily="18" charset="0"/>
                             </a:rPr>
@@ -32825,7 +33127,10 @@
                           <m:r>
                             <a:rPr lang="en-US" sz="2800" b="0" i="1" smtClean="0">
                               <a:solidFill>
-                                <a:schemeClr val="accent5"/>
+                                <a:schemeClr val="accent5">
+                                  <a:lumMod val="60000"/>
+                                  <a:lumOff val="40000"/>
+                                </a:schemeClr>
                               </a:solidFill>
                               <a:latin typeface="Cambria Math" panose="02040503050406030204" pitchFamily="18" charset="0"/>
                             </a:rPr>
@@ -32834,7 +33139,10 @@
                           <m:r>
                             <a:rPr lang="en-US" sz="2800" b="0" i="1" smtClean="0">
                               <a:solidFill>
-                                <a:schemeClr val="accent1"/>
+                                <a:schemeClr val="accent1">
+                                  <a:lumMod val="60000"/>
+                                  <a:lumOff val="40000"/>
+                                </a:schemeClr>
                               </a:solidFill>
                               <a:latin typeface="Cambria Math" panose="02040503050406030204" pitchFamily="18" charset="0"/>
                             </a:rPr>
@@ -32845,7 +33153,10 @@
                       <m:r>
                         <a:rPr lang="en-US" sz="2800" b="0" i="1" smtClean="0">
                           <a:solidFill>
-                            <a:schemeClr val="accent5"/>
+                            <a:schemeClr val="accent5">
+                              <a:lumMod val="60000"/>
+                              <a:lumOff val="40000"/>
+                            </a:schemeClr>
                           </a:solidFill>
                           <a:latin typeface="Cambria Math" panose="02040503050406030204" pitchFamily="18" charset="0"/>
                         </a:rPr>
@@ -32854,7 +33165,10 @@
                       <m:r>
                         <a:rPr lang="en-US" sz="2800" b="0" i="1" smtClean="0">
                           <a:solidFill>
-                            <a:schemeClr val="accent1"/>
+                            <a:schemeClr val="accent1">
+                              <a:lumMod val="60000"/>
+                              <a:lumOff val="40000"/>
+                            </a:schemeClr>
                           </a:solidFill>
                           <a:latin typeface="Cambria Math" panose="02040503050406030204" pitchFamily="18" charset="0"/>
                         </a:rPr>
@@ -32868,7 +33182,7 @@
             </p:txBody>
           </p:sp>
         </mc:Choice>
-        <mc:Fallback xmlns="">
+        <mc:Fallback>
           <p:sp>
             <p:nvSpPr>
               <p:cNvPr id="2" name="TextBox 1">
